--- a/figures/figures.pptx
+++ b/figures/figures.pptx
@@ -972,18 +972,20 @@
         </p:nvSpPr>
         <p:spPr>
           <a:xfrm>
-            <a:off x="320040" y="320040"/>
-            <a:ext cx="3200400" cy="3429000"/>
-          </a:xfrm>
-          <a:prstGeom prst="rect">
-            <a:avLst/>
+            <a:off x="274320" y="274320"/>
+            <a:ext cx="3246120" cy="3429000"/>
+          </a:xfrm>
+          <a:prstGeom prst="roundRect">
+            <a:avLst>
+              <a:gd name="adj" fmla="val 3380"/>
+            </a:avLst>
           </a:prstGeom>
           <a:solidFill>
-            <a:srgbClr val="FFFFFF"/>
+            <a:srgbClr val="F3F4F7"/>
           </a:solidFill>
-          <a:ln w="12700">
+          <a:ln w="9525">
             <a:solidFill>
-              <a:srgbClr val="777777"/>
+              <a:srgbClr val="D5D9E0"/>
             </a:solidFill>
             <a:prstDash val="solid"/>
           </a:ln>
@@ -997,7 +999,7 @@
         </p:nvSpPr>
         <p:spPr>
           <a:xfrm>
-            <a:off x="457200" y="429768"/>
+            <a:off x="457200" y="384048"/>
             <a:ext cx="2926080" cy="457200"/>
           </a:xfrm>
           <a:prstGeom prst="rect">
@@ -1019,11 +1021,11 @@
             <a:r>
               <a:rPr lang="en-US" sz="1100" b="1" dirty="0">
                 <a:solidFill>
-                  <a:srgbClr val="111111"/>
-                </a:solidFill>
-                <a:latin typeface="Arial" pitchFamily="34" charset="0"/>
-                <a:ea typeface="Arial" pitchFamily="34" charset="-122"/>
-                <a:cs typeface="Arial" pitchFamily="34" charset="-120"/>
+                  <a:srgbClr val="1F2A44"/>
+                </a:solidFill>
+                <a:latin typeface="Calibri" pitchFamily="34" charset="0"/>
+                <a:ea typeface="Calibri" pitchFamily="34" charset="-122"/>
+                <a:cs typeface="Calibri" pitchFamily="34" charset="-120"/>
               </a:rPr>
               <a:t>Example task: save two open blog posts as PDFs</a:t>
             </a:r>
@@ -1039,8 +1041,8 @@
         </p:nvSpPr>
         <p:spPr>
           <a:xfrm>
-            <a:off x="457200" y="932688"/>
-            <a:ext cx="2926080" cy="201168"/>
+            <a:off x="457200" y="896112"/>
+            <a:ext cx="2926080" cy="228600"/>
           </a:xfrm>
           <a:prstGeom prst="rect">
             <a:avLst/>
@@ -1059,17 +1061,17 @@
               <a:buNone/>
             </a:pPr>
             <a:r>
-              <a:rPr lang="en-US" sz="950" b="1" dirty="0">
-                <a:solidFill>
-                  <a:srgbClr val="1F4E8C"/>
-                </a:solidFill>
-                <a:latin typeface="Arial" pitchFamily="34" charset="0"/>
-                <a:ea typeface="Arial" pitchFamily="34" charset="-122"/>
-                <a:cs typeface="Arial" pitchFamily="34" charset="-120"/>
+              <a:rPr lang="en-US" sz="1000" b="1" dirty="0">
+                <a:solidFill>
+                  <a:srgbClr val="2F6FB3"/>
+                </a:solidFill>
+                <a:latin typeface="Calibri" pitchFamily="34" charset="0"/>
+                <a:ea typeface="Calibri" pitchFamily="34" charset="-122"/>
+                <a:cs typeface="Calibri" pitchFamily="34" charset="-120"/>
               </a:rPr>
               <a:t>English instruction</a:t>
             </a:r>
-            <a:endParaRPr lang="en-US" sz="950" dirty="0"/>
+            <a:endParaRPr lang="en-US" sz="1000" dirty="0"/>
           </a:p>
         </p:txBody>
       </p:sp>
@@ -1081,7 +1083,7 @@
         </p:nvSpPr>
         <p:spPr>
           <a:xfrm>
-            <a:off x="457200" y="1143000"/>
+            <a:off x="457200" y="1115568"/>
             <a:ext cx="2926080" cy="777240"/>
           </a:xfrm>
           <a:prstGeom prst="rect">
@@ -1101,30 +1103,156 @@
               <a:buNone/>
             </a:pPr>
             <a:r>
-              <a:rPr lang="en-US" sz="1000" dirty="0">
-                <a:solidFill>
-                  <a:srgbClr val="111111"/>
-                </a:solidFill>
-                <a:latin typeface="Arial" pitchFamily="34" charset="0"/>
-                <a:ea typeface="Arial" pitchFamily="34" charset="-122"/>
-                <a:cs typeface="Arial" pitchFamily="34" charset="-120"/>
+              <a:rPr lang="en-US" sz="1050" dirty="0">
+                <a:solidFill>
+                  <a:srgbClr val="1F2A44"/>
+                </a:solidFill>
+                <a:latin typeface="Calibri" pitchFamily="34" charset="0"/>
+                <a:ea typeface="Calibri" pitchFamily="34" charset="-122"/>
+                <a:cs typeface="Calibri" pitchFamily="34" charset="-120"/>
               </a:rPr>
               <a:t>“Please download the blogs opening now in PDF format and save them in their title to /home/user/Documents/Blog.”</a:t>
             </a:r>
+            <a:endParaRPr lang="en-US" sz="1050" dirty="0"/>
+          </a:p>
+        </p:txBody>
+      </p:sp>
+      <p:sp>
+        <p:nvSpPr>
+          <p:cNvPr id="6" name="Text 4"/>
+          <p:cNvSpPr txBox="1"/>
+          <p:nvPr/>
+        </p:nvSpPr>
+        <p:spPr>
+          <a:xfrm>
+            <a:off x="457200" y="1920240"/>
+            <a:ext cx="2926080" cy="228600"/>
+          </a:xfrm>
+          <a:prstGeom prst="rect">
+            <a:avLst/>
+          </a:prstGeom>
+          <a:noFill/>
+          <a:ln/>
+        </p:spPr>
+        <p:txBody>
+          <a:bodyPr wrap="square" lIns="0" tIns="0" rIns="0" bIns="0" rtlCol="0" anchor="t"/>
+          <a:lstStyle/>
+          <a:p>
+            <a:pPr algn="l" indent="0" marL="0">
+              <a:lnSpc>
+                <a:spcPct val="100000"/>
+              </a:lnSpc>
+              <a:buNone/>
+            </a:pPr>
+            <a:r>
+              <a:rPr lang="en-US" sz="1000" b="1" dirty="0">
+                <a:solidFill>
+                  <a:srgbClr val="2C7A4B"/>
+                </a:solidFill>
+                <a:latin typeface="Calibri" pitchFamily="34" charset="0"/>
+                <a:ea typeface="Calibri" pitchFamily="34" charset="-122"/>
+                <a:cs typeface="Calibri" pitchFamily="34" charset="-120"/>
+              </a:rPr>
+              <a:t>Arabic instruction (human translated)</a:t>
+            </a:r>
             <a:endParaRPr lang="en-US" sz="1000" dirty="0"/>
           </a:p>
         </p:txBody>
       </p:sp>
       <p:sp>
         <p:nvSpPr>
-          <p:cNvPr id="6" name="Text 4"/>
-          <p:cNvSpPr txBox="1"/>
-          <p:nvPr/>
-        </p:nvSpPr>
-        <p:spPr>
-          <a:xfrm>
-            <a:off x="457200" y="1965960"/>
-            <a:ext cx="2926080" cy="201168"/>
+          <p:cNvPr id="7" name="Text 5"/>
+          <p:cNvSpPr txBox="1"/>
+          <p:nvPr/>
+        </p:nvSpPr>
+        <p:spPr>
+          <a:xfrm>
+            <a:off x="457200" y="2148840"/>
+            <a:ext cx="2926080" cy="548640"/>
+          </a:xfrm>
+          <a:prstGeom prst="rect">
+            <a:avLst/>
+          </a:prstGeom>
+          <a:noFill/>
+          <a:ln/>
+        </p:spPr>
+        <p:txBody>
+          <a:bodyPr wrap="square" lIns="0" tIns="0" rIns="0" bIns="0" rtlCol="0" anchor="t"/>
+          <a:lstStyle/>
+          <a:p>
+            <a:pPr rtl="1" algn="r" indent="0" marL="0">
+              <a:lnSpc>
+                <a:spcPct val="105000"/>
+              </a:lnSpc>
+              <a:buNone/>
+            </a:pPr>
+            <a:r>
+              <a:rPr lang="ar-SA" altLang="en-US" sz="1050" dirty="0">
+                <a:solidFill>
+                  <a:srgbClr val="1F2A44"/>
+                </a:solidFill>
+                <a:latin typeface="Calibri" pitchFamily="34" charset="0"/>
+                <a:ea typeface="Calibri" pitchFamily="34" charset="-122"/>
+                <a:cs typeface="Calibri" pitchFamily="34" charset="-120"/>
+              </a:rPr>
+              <a:t>يرجى تنزيل المدوّنات المفتوحة الآن بصيغة PDF وحفظها بعناوينها في المسار:</a:t>
+            </a:r>
+            <a:endParaRPr lang="ar-SA" sz="1050" dirty="0"/>
+          </a:p>
+        </p:txBody>
+      </p:sp>
+      <p:sp>
+        <p:nvSpPr>
+          <p:cNvPr id="8" name="Text 6"/>
+          <p:cNvSpPr txBox="1"/>
+          <p:nvPr/>
+        </p:nvSpPr>
+        <p:spPr>
+          <a:xfrm>
+            <a:off x="457200" y="2697480"/>
+            <a:ext cx="2926080" cy="274320"/>
+          </a:xfrm>
+          <a:prstGeom prst="rect">
+            <a:avLst/>
+          </a:prstGeom>
+          <a:noFill/>
+          <a:ln/>
+        </p:spPr>
+        <p:txBody>
+          <a:bodyPr wrap="square" lIns="0" tIns="0" rIns="0" bIns="0" rtlCol="0" anchor="t"/>
+          <a:lstStyle/>
+          <a:p>
+            <a:pPr algn="r" indent="0" marL="0">
+              <a:lnSpc>
+                <a:spcPct val="100000"/>
+              </a:lnSpc>
+              <a:buNone/>
+            </a:pPr>
+            <a:r>
+              <a:rPr lang="en-US" sz="1050" dirty="0">
+                <a:solidFill>
+                  <a:srgbClr val="1F2A44"/>
+                </a:solidFill>
+                <a:latin typeface="Calibri" pitchFamily="34" charset="0"/>
+                <a:ea typeface="Calibri" pitchFamily="34" charset="-122"/>
+                <a:cs typeface="Calibri" pitchFamily="34" charset="-120"/>
+              </a:rPr>
+              <a:t>/home/user/Documents/Blog</a:t>
+            </a:r>
+            <a:endParaRPr lang="en-US" sz="1050" dirty="0"/>
+          </a:p>
+        </p:txBody>
+      </p:sp>
+      <p:sp>
+        <p:nvSpPr>
+          <p:cNvPr id="9" name="Text 7"/>
+          <p:cNvSpPr txBox="1"/>
+          <p:nvPr/>
+        </p:nvSpPr>
+        <p:spPr>
+          <a:xfrm>
+            <a:off x="457200" y="3063240"/>
+            <a:ext cx="2926080" cy="548640"/>
           </a:xfrm>
           <a:prstGeom prst="rect">
             <a:avLst/>
@@ -1138,144 +1266,18 @@
           <a:p>
             <a:pPr algn="l" indent="0" marL="0">
               <a:lnSpc>
-                <a:spcPct val="100000"/>
-              </a:lnSpc>
-              <a:buNone/>
-            </a:pPr>
-            <a:r>
-              <a:rPr lang="en-US" sz="950" b="1" dirty="0">
-                <a:solidFill>
-                  <a:srgbClr val="1E6B3A"/>
-                </a:solidFill>
-                <a:latin typeface="Arial" pitchFamily="34" charset="0"/>
-                <a:ea typeface="Arial" pitchFamily="34" charset="-122"/>
-                <a:cs typeface="Arial" pitchFamily="34" charset="-120"/>
-              </a:rPr>
-              <a:t>Arabic instruction (human translated)</a:t>
-            </a:r>
-            <a:endParaRPr lang="en-US" sz="950" dirty="0"/>
-          </a:p>
-        </p:txBody>
-      </p:sp>
-      <p:sp>
-        <p:nvSpPr>
-          <p:cNvPr id="7" name="Text 5"/>
-          <p:cNvSpPr txBox="1"/>
-          <p:nvPr/>
-        </p:nvSpPr>
-        <p:spPr>
-          <a:xfrm>
-            <a:off x="457200" y="2176272"/>
-            <a:ext cx="2926080" cy="502920"/>
-          </a:xfrm>
-          <a:prstGeom prst="rect">
-            <a:avLst/>
-          </a:prstGeom>
-          <a:noFill/>
-          <a:ln/>
-        </p:spPr>
-        <p:txBody>
-          <a:bodyPr wrap="square" lIns="0" tIns="0" rIns="0" bIns="0" rtlCol="0" anchor="t"/>
-          <a:lstStyle/>
-          <a:p>
-            <a:pPr rtl="1" algn="r" indent="0" marL="0">
-              <a:lnSpc>
                 <a:spcPct val="105000"/>
               </a:lnSpc>
               <a:buNone/>
             </a:pPr>
             <a:r>
-              <a:rPr lang="ar-SA" altLang="en-US" sz="1000" dirty="0">
-                <a:solidFill>
-                  <a:srgbClr val="111111"/>
-                </a:solidFill>
-                <a:latin typeface="Arial" pitchFamily="34" charset="0"/>
-                <a:ea typeface="Arial" pitchFamily="34" charset="-122"/>
-                <a:cs typeface="Arial" pitchFamily="34" charset="-120"/>
-              </a:rPr>
-              <a:t>يرجى تنزيل المدوّنات المفتوحة الآن بصيغة PDF وحفظها بعناوينها في المسار:</a:t>
-            </a:r>
-            <a:endParaRPr lang="ar-SA" sz="1000" dirty="0"/>
-          </a:p>
-        </p:txBody>
-      </p:sp>
-      <p:sp>
-        <p:nvSpPr>
-          <p:cNvPr id="8" name="Text 6"/>
-          <p:cNvSpPr txBox="1"/>
-          <p:nvPr/>
-        </p:nvSpPr>
-        <p:spPr>
-          <a:xfrm>
-            <a:off x="457200" y="2679192"/>
-            <a:ext cx="2926080" cy="228600"/>
-          </a:xfrm>
-          <a:prstGeom prst="rect">
-            <a:avLst/>
-          </a:prstGeom>
-          <a:noFill/>
-          <a:ln/>
-        </p:spPr>
-        <p:txBody>
-          <a:bodyPr wrap="square" lIns="0" tIns="0" rIns="0" bIns="0" rtlCol="0" anchor="t"/>
-          <a:lstStyle/>
-          <a:p>
-            <a:pPr algn="r" indent="0" marL="0">
-              <a:lnSpc>
-                <a:spcPct val="100000"/>
-              </a:lnSpc>
-              <a:buNone/>
-            </a:pPr>
-            <a:r>
-              <a:rPr lang="en-US" sz="1000" dirty="0">
-                <a:solidFill>
-                  <a:srgbClr val="111111"/>
-                </a:solidFill>
-                <a:latin typeface="Arial" pitchFamily="34" charset="0"/>
-                <a:ea typeface="Arial" pitchFamily="34" charset="-122"/>
-                <a:cs typeface="Arial" pitchFamily="34" charset="-120"/>
-              </a:rPr>
-              <a:t>/home/user/Documents/Blog</a:t>
-            </a:r>
-            <a:endParaRPr lang="en-US" sz="1000" dirty="0"/>
-          </a:p>
-        </p:txBody>
-      </p:sp>
-      <p:sp>
-        <p:nvSpPr>
-          <p:cNvPr id="9" name="Text 7"/>
-          <p:cNvSpPr txBox="1"/>
-          <p:nvPr/>
-        </p:nvSpPr>
-        <p:spPr>
-          <a:xfrm>
-            <a:off x="457200" y="3063240"/>
-            <a:ext cx="2926080" cy="594360"/>
-          </a:xfrm>
-          <a:prstGeom prst="rect">
-            <a:avLst/>
-          </a:prstGeom>
-          <a:noFill/>
-          <a:ln/>
-        </p:spPr>
-        <p:txBody>
-          <a:bodyPr wrap="square" lIns="0" tIns="0" rIns="0" bIns="0" rtlCol="0" anchor="t"/>
-          <a:lstStyle/>
-          <a:p>
-            <a:pPr algn="l" indent="0" marL="0">
-              <a:lnSpc>
-                <a:spcPct val="105000"/>
-              </a:lnSpc>
-              <a:buNone/>
-            </a:pPr>
-            <a:r>
               <a:rPr lang="en-US" sz="900" dirty="0">
                 <a:solidFill>
-                  <a:srgbClr val="444444"/>
-                </a:solidFill>
-                <a:latin typeface="Arial" pitchFamily="34" charset="0"/>
-                <a:ea typeface="Arial" pitchFamily="34" charset="-122"/>
-                <a:cs typeface="Arial" pitchFamily="34" charset="-120"/>
+                  <a:srgbClr val="5B6470"/>
+                </a:solidFill>
+                <a:latin typeface="Calibri" pitchFamily="34" charset="0"/>
+                <a:ea typeface="Calibri" pitchFamily="34" charset="-122"/>
+                <a:cs typeface="Calibri" pitchFamily="34" charset="-120"/>
               </a:rPr>
               <a:t>The same task is also translated to Egyptian, Syrian, Qatari, Sudanese and Algerian Arabic.</a:t>
             </a:r>
@@ -1291,18 +1293,20 @@
         </p:nvSpPr>
         <p:spPr>
           <a:xfrm>
-            <a:off x="3749040" y="320040"/>
-            <a:ext cx="8138160" cy="1847088"/>
-          </a:xfrm>
-          <a:prstGeom prst="rect">
-            <a:avLst/>
+            <a:off x="3703320" y="246888"/>
+            <a:ext cx="8183880" cy="1691640"/>
+          </a:xfrm>
+          <a:prstGeom prst="roundRect">
+            <a:avLst>
+              <a:gd name="adj" fmla="val 4324"/>
+            </a:avLst>
           </a:prstGeom>
           <a:solidFill>
-            <a:srgbClr val="FFFFFF"/>
+            <a:srgbClr val="E8F0FA"/>
           </a:solidFill>
-          <a:ln w="15875">
+          <a:ln w="9525">
             <a:solidFill>
-              <a:srgbClr val="1F4E8C"/>
+              <a:srgbClr val="E8F0FA"/>
             </a:solidFill>
             <a:prstDash val="solid"/>
           </a:ln>
@@ -1316,8 +1320,8 @@
         </p:nvSpPr>
         <p:spPr>
           <a:xfrm>
-            <a:off x="3840480" y="374904"/>
-            <a:ext cx="2286000" cy="201168"/>
+            <a:off x="3794760" y="310896"/>
+            <a:ext cx="1828800" cy="201168"/>
           </a:xfrm>
           <a:prstGeom prst="rect">
             <a:avLst/>
@@ -1336,17 +1340,17 @@
               <a:buNone/>
             </a:pPr>
             <a:r>
-              <a:rPr lang="en-US" sz="1000" b="1" dirty="0">
-                <a:solidFill>
-                  <a:srgbClr val="1F4E8C"/>
-                </a:solidFill>
-                <a:latin typeface="Arial" pitchFamily="34" charset="0"/>
-                <a:ea typeface="Arial" pitchFamily="34" charset="-122"/>
-                <a:cs typeface="Arial" pitchFamily="34" charset="-120"/>
+              <a:rPr lang="en-US" sz="900" b="1" dirty="0">
+                <a:solidFill>
+                  <a:srgbClr val="2F6FB3"/>
+                </a:solidFill>
+                <a:latin typeface="Calibri" pitchFamily="34" charset="0"/>
+                <a:ea typeface="Calibri" pitchFamily="34" charset="-122"/>
+                <a:cs typeface="Calibri" pitchFamily="34" charset="-120"/>
               </a:rPr>
               <a:t>English machine</a:t>
             </a:r>
-            <a:endParaRPr lang="en-US" sz="1000" dirty="0"/>
+            <a:endParaRPr lang="en-US" sz="900" dirty="0"/>
           </a:p>
         </p:txBody>
       </p:sp>
@@ -1366,7 +1370,7 @@
         </p:blipFill>
         <p:spPr>
           <a:xfrm>
-            <a:off x="3886200" y="594360"/>
+            <a:off x="3840480" y="512064"/>
             <a:ext cx="2240280" cy="1252728"/>
           </a:xfrm>
           <a:prstGeom prst="rect">
@@ -1382,8 +1386,8 @@
         </p:nvSpPr>
         <p:spPr>
           <a:xfrm>
-            <a:off x="3886200" y="1874520"/>
-            <a:ext cx="2240280" cy="457200"/>
+            <a:off x="3840480" y="1792224"/>
+            <a:ext cx="2240280" cy="274320"/>
           </a:xfrm>
           <a:prstGeom prst="rect">
             <a:avLst/>
@@ -1402,43 +1406,61 @@
               <a:buNone/>
             </a:pPr>
             <a:r>
-              <a:rPr lang="en-US" sz="800" dirty="0">
-                <a:solidFill>
-                  <a:srgbClr val="444444"/>
-                </a:solidFill>
-                <a:latin typeface="Arial" pitchFamily="34" charset="0"/>
-                <a:ea typeface="Arial" pitchFamily="34" charset="-122"/>
-                <a:cs typeface="Arial" pitchFamily="34" charset="-120"/>
+              <a:rPr lang="en-US" sz="850" dirty="0">
+                <a:solidFill>
+                  <a:srgbClr val="5B6470"/>
+                </a:solidFill>
+                <a:latin typeface="Calibri" pitchFamily="34" charset="0"/>
+                <a:ea typeface="Calibri" pitchFamily="34" charset="-122"/>
+                <a:cs typeface="Calibri" pitchFamily="34" charset="-120"/>
               </a:rPr>
               <a:t>Print, save as PDF</a:t>
             </a:r>
-            <a:endParaRPr lang="en-US" sz="800" dirty="0"/>
-          </a:p>
-        </p:txBody>
-      </p:sp>
-      <p:sp>
-        <p:nvSpPr>
-          <p:cNvPr id="14" name="Shape 11"/>
-          <p:cNvSpPr/>
-          <p:nvPr/>
-        </p:nvSpPr>
-        <p:spPr>
-          <a:xfrm>
-            <a:off x="6153912" y="1220724"/>
-            <a:ext cx="128016" cy="0"/>
-          </a:xfrm>
-          <a:prstGeom prst="line">
-            <a:avLst/>
-          </a:prstGeom>
-          <a:noFill/>
-          <a:ln w="15875">
-            <a:solidFill>
-              <a:srgbClr val="111111"/>
-            </a:solidFill>
-            <a:prstDash val="solid"/>
-            <a:tailEnd type="triangle"/>
-          </a:ln>
-        </p:spPr>
+            <a:endParaRPr lang="en-US" sz="850" dirty="0"/>
+          </a:p>
+        </p:txBody>
+      </p:sp>
+      <p:sp>
+        <p:nvSpPr>
+          <p:cNvPr id="14" name="Text 11"/>
+          <p:cNvSpPr txBox="1"/>
+          <p:nvPr/>
+        </p:nvSpPr>
+        <p:spPr>
+          <a:xfrm>
+            <a:off x="6099048" y="1001268"/>
+            <a:ext cx="164592" cy="274320"/>
+          </a:xfrm>
+          <a:prstGeom prst="rect">
+            <a:avLst/>
+          </a:prstGeom>
+          <a:noFill/>
+          <a:ln/>
+        </p:spPr>
+        <p:txBody>
+          <a:bodyPr wrap="square" lIns="0" tIns="0" rIns="0" bIns="0" rtlCol="0" anchor="t"/>
+          <a:lstStyle/>
+          <a:p>
+            <a:pPr algn="ctr" indent="0" marL="0">
+              <a:lnSpc>
+                <a:spcPct val="100000"/>
+              </a:lnSpc>
+              <a:buNone/>
+            </a:pPr>
+            <a:r>
+              <a:rPr lang="en-US" sz="1600" dirty="0">
+                <a:solidFill>
+                  <a:srgbClr val="9AA3AF"/>
+                </a:solidFill>
+                <a:latin typeface="Calibri" pitchFamily="34" charset="0"/>
+                <a:ea typeface="Calibri" pitchFamily="34" charset="-122"/>
+                <a:cs typeface="Calibri" pitchFamily="34" charset="-120"/>
+              </a:rPr>
+              <a:t>›</a:t>
+            </a:r>
+            <a:endParaRPr lang="en-US" sz="1600" dirty="0"/>
+          </a:p>
+        </p:txBody>
       </p:sp>
       <p:pic>
         <p:nvPicPr>
@@ -1456,7 +1478,7 @@
         </p:blipFill>
         <p:spPr>
           <a:xfrm>
-            <a:off x="6309360" y="594360"/>
+            <a:off x="6263640" y="512064"/>
             <a:ext cx="2240280" cy="1252728"/>
           </a:xfrm>
           <a:prstGeom prst="rect">
@@ -1472,8 +1494,8 @@
         </p:nvSpPr>
         <p:spPr>
           <a:xfrm>
-            <a:off x="6309360" y="1874520"/>
-            <a:ext cx="2240280" cy="457200"/>
+            <a:off x="6263640" y="1792224"/>
+            <a:ext cx="2240280" cy="274320"/>
           </a:xfrm>
           <a:prstGeom prst="rect">
             <a:avLst/>
@@ -1492,43 +1514,61 @@
               <a:buNone/>
             </a:pPr>
             <a:r>
-              <a:rPr lang="en-US" sz="800" dirty="0">
-                <a:solidFill>
-                  <a:srgbClr val="444444"/>
-                </a:solidFill>
-                <a:latin typeface="Arial" pitchFamily="34" charset="0"/>
-                <a:ea typeface="Arial" pitchFamily="34" charset="-122"/>
-                <a:cs typeface="Arial" pitchFamily="34" charset="-120"/>
+              <a:rPr lang="en-US" sz="850" dirty="0">
+                <a:solidFill>
+                  <a:srgbClr val="5B6470"/>
+                </a:solidFill>
+                <a:latin typeface="Calibri" pitchFamily="34" charset="0"/>
+                <a:ea typeface="Calibri" pitchFamily="34" charset="-122"/>
+                <a:cs typeface="Calibri" pitchFamily="34" charset="-120"/>
               </a:rPr>
               <a:t>Creates Documents/Blog, saves the first article</a:t>
             </a:r>
-            <a:endParaRPr lang="en-US" sz="800" dirty="0"/>
-          </a:p>
-        </p:txBody>
-      </p:sp>
-      <p:sp>
-        <p:nvSpPr>
-          <p:cNvPr id="17" name="Shape 13"/>
-          <p:cNvSpPr/>
-          <p:nvPr/>
-        </p:nvSpPr>
-        <p:spPr>
-          <a:xfrm>
-            <a:off x="8577072" y="1220724"/>
-            <a:ext cx="128016" cy="0"/>
-          </a:xfrm>
-          <a:prstGeom prst="line">
-            <a:avLst/>
-          </a:prstGeom>
-          <a:noFill/>
-          <a:ln w="15875">
-            <a:solidFill>
-              <a:srgbClr val="111111"/>
-            </a:solidFill>
-            <a:prstDash val="solid"/>
-            <a:tailEnd type="triangle"/>
-          </a:ln>
-        </p:spPr>
+            <a:endParaRPr lang="en-US" sz="850" dirty="0"/>
+          </a:p>
+        </p:txBody>
+      </p:sp>
+      <p:sp>
+        <p:nvSpPr>
+          <p:cNvPr id="17" name="Text 13"/>
+          <p:cNvSpPr txBox="1"/>
+          <p:nvPr/>
+        </p:nvSpPr>
+        <p:spPr>
+          <a:xfrm>
+            <a:off x="8522208" y="1001268"/>
+            <a:ext cx="164592" cy="274320"/>
+          </a:xfrm>
+          <a:prstGeom prst="rect">
+            <a:avLst/>
+          </a:prstGeom>
+          <a:noFill/>
+          <a:ln/>
+        </p:spPr>
+        <p:txBody>
+          <a:bodyPr wrap="square" lIns="0" tIns="0" rIns="0" bIns="0" rtlCol="0" anchor="t"/>
+          <a:lstStyle/>
+          <a:p>
+            <a:pPr algn="ctr" indent="0" marL="0">
+              <a:lnSpc>
+                <a:spcPct val="100000"/>
+              </a:lnSpc>
+              <a:buNone/>
+            </a:pPr>
+            <a:r>
+              <a:rPr lang="en-US" sz="1600" dirty="0">
+                <a:solidFill>
+                  <a:srgbClr val="9AA3AF"/>
+                </a:solidFill>
+                <a:latin typeface="Calibri" pitchFamily="34" charset="0"/>
+                <a:ea typeface="Calibri" pitchFamily="34" charset="-122"/>
+                <a:cs typeface="Calibri" pitchFamily="34" charset="-120"/>
+              </a:rPr>
+              <a:t>›</a:t>
+            </a:r>
+            <a:endParaRPr lang="en-US" sz="1600" dirty="0"/>
+          </a:p>
+        </p:txBody>
       </p:sp>
       <p:pic>
         <p:nvPicPr>
@@ -1546,7 +1586,7 @@
         </p:blipFill>
         <p:spPr>
           <a:xfrm>
-            <a:off x="8732520" y="594360"/>
+            <a:off x="8686800" y="512064"/>
             <a:ext cx="2240280" cy="1252728"/>
           </a:xfrm>
           <a:prstGeom prst="rect">
@@ -1562,8 +1602,8 @@
         </p:nvSpPr>
         <p:spPr>
           <a:xfrm>
-            <a:off x="8732520" y="1874520"/>
-            <a:ext cx="2240280" cy="457200"/>
+            <a:off x="8686800" y="1792224"/>
+            <a:ext cx="2240280" cy="274320"/>
           </a:xfrm>
           <a:prstGeom prst="rect">
             <a:avLst/>
@@ -1582,17 +1622,17 @@
               <a:buNone/>
             </a:pPr>
             <a:r>
-              <a:rPr lang="en-US" sz="800" dirty="0">
-                <a:solidFill>
-                  <a:srgbClr val="444444"/>
-                </a:solidFill>
-                <a:latin typeface="Arial" pitchFamily="34" charset="0"/>
-                <a:ea typeface="Arial" pitchFamily="34" charset="-122"/>
-                <a:cs typeface="Arial" pitchFamily="34" charset="-120"/>
+              <a:rPr lang="en-US" sz="850" dirty="0">
+                <a:solidFill>
+                  <a:srgbClr val="5B6470"/>
+                </a:solidFill>
+                <a:latin typeface="Calibri" pitchFamily="34" charset="0"/>
+                <a:ea typeface="Calibri" pitchFamily="34" charset="-122"/>
+                <a:cs typeface="Calibri" pitchFamily="34" charset="-120"/>
               </a:rPr>
               <a:t>Saves the second article, done at step 21</a:t>
             </a:r>
-            <a:endParaRPr lang="en-US" sz="800" dirty="0"/>
+            <a:endParaRPr lang="en-US" sz="850" dirty="0"/>
           </a:p>
         </p:txBody>
       </p:sp>
@@ -1604,13 +1644,17 @@
         </p:nvSpPr>
         <p:spPr>
           <a:xfrm>
-            <a:off x="11064240" y="1005840"/>
-            <a:ext cx="731520" cy="365760"/>
-          </a:xfrm>
-          <a:prstGeom prst="rect">
-            <a:avLst/>
-          </a:prstGeom>
-          <a:noFill/>
+            <a:off x="11018520" y="978408"/>
+            <a:ext cx="822960" cy="365760"/>
+          </a:xfrm>
+          <a:prstGeom prst="roundRect">
+            <a:avLst>
+              <a:gd name="adj" fmla="val 20000"/>
+            </a:avLst>
+          </a:prstGeom>
+          <a:solidFill>
+            <a:srgbClr val="2E8B57"/>
+          </a:solidFill>
           <a:ln/>
         </p:spPr>
         <p:txBody>
@@ -1624,17 +1668,17 @@
               <a:buNone/>
             </a:pPr>
             <a:r>
-              <a:rPr lang="en-US" sz="1400" b="1" dirty="0">
-                <a:solidFill>
-                  <a:srgbClr val="1E7B3B"/>
-                </a:solidFill>
-                <a:latin typeface="Arial" pitchFamily="34" charset="0"/>
-                <a:ea typeface="Arial" pitchFamily="34" charset="-122"/>
-                <a:cs typeface="Arial" pitchFamily="34" charset="-120"/>
+              <a:rPr lang="en-US" sz="1200" b="1" dirty="0">
+                <a:solidFill>
+                  <a:srgbClr val="FFFFFF"/>
+                </a:solidFill>
+                <a:latin typeface="Calibri" pitchFamily="34" charset="0"/>
+                <a:ea typeface="Calibri" pitchFamily="34" charset="-122"/>
+                <a:cs typeface="Calibri" pitchFamily="34" charset="-120"/>
               </a:rPr>
               <a:t>PASS</a:t>
             </a:r>
-            <a:endParaRPr lang="en-US" sz="1400" dirty="0"/>
+            <a:endParaRPr lang="en-US" sz="1200" dirty="0"/>
           </a:p>
         </p:txBody>
       </p:sp>
@@ -1646,18 +1690,20 @@
         </p:nvSpPr>
         <p:spPr>
           <a:xfrm>
-            <a:off x="3749040" y="2240280"/>
-            <a:ext cx="8138160" cy="1847088"/>
-          </a:xfrm>
-          <a:prstGeom prst="rect">
-            <a:avLst/>
+            <a:off x="3703320" y="2011680"/>
+            <a:ext cx="8183880" cy="1691640"/>
+          </a:xfrm>
+          <a:prstGeom prst="roundRect">
+            <a:avLst>
+              <a:gd name="adj" fmla="val 4324"/>
+            </a:avLst>
           </a:prstGeom>
           <a:solidFill>
-            <a:srgbClr val="FFFFFF"/>
+            <a:srgbClr val="E9F5EE"/>
           </a:solidFill>
-          <a:ln w="15875">
+          <a:ln w="9525">
             <a:solidFill>
-              <a:srgbClr val="1E6B3A"/>
+              <a:srgbClr val="E9F5EE"/>
             </a:solidFill>
             <a:prstDash val="solid"/>
           </a:ln>
@@ -1671,8 +1717,8 @@
         </p:nvSpPr>
         <p:spPr>
           <a:xfrm>
-            <a:off x="3840480" y="2295144"/>
-            <a:ext cx="2286000" cy="201168"/>
+            <a:off x="3794760" y="2075688"/>
+            <a:ext cx="1828800" cy="201168"/>
           </a:xfrm>
           <a:prstGeom prst="rect">
             <a:avLst/>
@@ -1691,17 +1737,17 @@
               <a:buNone/>
             </a:pPr>
             <a:r>
-              <a:rPr lang="en-US" sz="1000" b="1" dirty="0">
-                <a:solidFill>
-                  <a:srgbClr val="1E6B3A"/>
-                </a:solidFill>
-                <a:latin typeface="Arial" pitchFamily="34" charset="0"/>
-                <a:ea typeface="Arial" pitchFamily="34" charset="-122"/>
-                <a:cs typeface="Arial" pitchFamily="34" charset="-120"/>
+              <a:rPr lang="en-US" sz="900" b="1" dirty="0">
+                <a:solidFill>
+                  <a:srgbClr val="2C7A4B"/>
+                </a:solidFill>
+                <a:latin typeface="Calibri" pitchFamily="34" charset="0"/>
+                <a:ea typeface="Calibri" pitchFamily="34" charset="-122"/>
+                <a:cs typeface="Calibri" pitchFamily="34" charset="-120"/>
               </a:rPr>
               <a:t>Arabic machine</a:t>
             </a:r>
-            <a:endParaRPr lang="en-US" sz="1000" dirty="0"/>
+            <a:endParaRPr lang="en-US" sz="900" dirty="0"/>
           </a:p>
         </p:txBody>
       </p:sp>
@@ -1721,7 +1767,7 @@
         </p:blipFill>
         <p:spPr>
           <a:xfrm>
-            <a:off x="3886200" y="2514600"/>
+            <a:off x="3840480" y="2276856"/>
             <a:ext cx="2240280" cy="1252728"/>
           </a:xfrm>
           <a:prstGeom prst="rect">
@@ -1737,8 +1783,8 @@
         </p:nvSpPr>
         <p:spPr>
           <a:xfrm>
-            <a:off x="3886200" y="3794760"/>
-            <a:ext cx="2240280" cy="457200"/>
+            <a:off x="3840480" y="3557016"/>
+            <a:ext cx="2240280" cy="274320"/>
           </a:xfrm>
           <a:prstGeom prst="rect">
             <a:avLst/>
@@ -1757,43 +1803,61 @@
               <a:buNone/>
             </a:pPr>
             <a:r>
-              <a:rPr lang="en-US" sz="800" dirty="0">
-                <a:solidFill>
-                  <a:srgbClr val="444444"/>
-                </a:solidFill>
-                <a:latin typeface="Arial" pitchFamily="34" charset="0"/>
-                <a:ea typeface="Arial" pitchFamily="34" charset="-122"/>
-                <a:cs typeface="Arial" pitchFamily="34" charset="-120"/>
+              <a:rPr lang="en-US" sz="850" dirty="0">
+                <a:solidFill>
+                  <a:srgbClr val="5B6470"/>
+                </a:solidFill>
+                <a:latin typeface="Calibri" pitchFamily="34" charset="0"/>
+                <a:ea typeface="Calibri" pitchFamily="34" charset="-122"/>
+                <a:cs typeface="Calibri" pitchFamily="34" charset="-120"/>
               </a:rPr>
               <a:t>Types the path /home/user/Documents/Blog</a:t>
             </a:r>
-            <a:endParaRPr lang="en-US" sz="800" dirty="0"/>
-          </a:p>
-        </p:txBody>
-      </p:sp>
-      <p:sp>
-        <p:nvSpPr>
-          <p:cNvPr id="25" name="Shape 19"/>
-          <p:cNvSpPr/>
-          <p:nvPr/>
-        </p:nvSpPr>
-        <p:spPr>
-          <a:xfrm>
-            <a:off x="6153912" y="3140964"/>
-            <a:ext cx="128016" cy="0"/>
-          </a:xfrm>
-          <a:prstGeom prst="line">
-            <a:avLst/>
-          </a:prstGeom>
-          <a:noFill/>
-          <a:ln w="15875">
-            <a:solidFill>
-              <a:srgbClr val="111111"/>
-            </a:solidFill>
-            <a:prstDash val="solid"/>
-            <a:tailEnd type="triangle"/>
-          </a:ln>
-        </p:spPr>
+            <a:endParaRPr lang="en-US" sz="850" dirty="0"/>
+          </a:p>
+        </p:txBody>
+      </p:sp>
+      <p:sp>
+        <p:nvSpPr>
+          <p:cNvPr id="25" name="Text 19"/>
+          <p:cNvSpPr txBox="1"/>
+          <p:nvPr/>
+        </p:nvSpPr>
+        <p:spPr>
+          <a:xfrm>
+            <a:off x="6099048" y="2766060"/>
+            <a:ext cx="164592" cy="274320"/>
+          </a:xfrm>
+          <a:prstGeom prst="rect">
+            <a:avLst/>
+          </a:prstGeom>
+          <a:noFill/>
+          <a:ln/>
+        </p:spPr>
+        <p:txBody>
+          <a:bodyPr wrap="square" lIns="0" tIns="0" rIns="0" bIns="0" rtlCol="0" anchor="t"/>
+          <a:lstStyle/>
+          <a:p>
+            <a:pPr algn="ctr" indent="0" marL="0">
+              <a:lnSpc>
+                <a:spcPct val="100000"/>
+              </a:lnSpc>
+              <a:buNone/>
+            </a:pPr>
+            <a:r>
+              <a:rPr lang="en-US" sz="1600" dirty="0">
+                <a:solidFill>
+                  <a:srgbClr val="9AA3AF"/>
+                </a:solidFill>
+                <a:latin typeface="Calibri" pitchFamily="34" charset="0"/>
+                <a:ea typeface="Calibri" pitchFamily="34" charset="-122"/>
+                <a:cs typeface="Calibri" pitchFamily="34" charset="-120"/>
+              </a:rPr>
+              <a:t>›</a:t>
+            </a:r>
+            <a:endParaRPr lang="en-US" sz="1600" dirty="0"/>
+          </a:p>
+        </p:txBody>
       </p:sp>
       <p:pic>
         <p:nvPicPr>
@@ -1811,7 +1875,7 @@
         </p:blipFill>
         <p:spPr>
           <a:xfrm>
-            <a:off x="6309360" y="2514600"/>
+            <a:off x="6263640" y="2276856"/>
             <a:ext cx="2240280" cy="1252728"/>
           </a:xfrm>
           <a:prstGeom prst="rect">
@@ -1827,8 +1891,8 @@
         </p:nvSpPr>
         <p:spPr>
           <a:xfrm>
-            <a:off x="6309360" y="3794760"/>
-            <a:ext cx="2240280" cy="457200"/>
+            <a:off x="6263640" y="3557016"/>
+            <a:ext cx="2240280" cy="274320"/>
           </a:xfrm>
           <a:prstGeom prst="rect">
             <a:avLst/>
@@ -1847,43 +1911,61 @@
               <a:buNone/>
             </a:pPr>
             <a:r>
-              <a:rPr lang="en-US" sz="800" dirty="0">
-                <a:solidFill>
-                  <a:srgbClr val="444444"/>
-                </a:solidFill>
-                <a:latin typeface="Arial" pitchFamily="34" charset="0"/>
-                <a:ea typeface="Arial" pitchFamily="34" charset="-122"/>
-                <a:cs typeface="Arial" pitchFamily="34" charset="-120"/>
+              <a:rPr lang="en-US" sz="850" dirty="0">
+                <a:solidFill>
+                  <a:srgbClr val="5B6470"/>
+                </a:solidFill>
+                <a:latin typeface="Calibri" pitchFamily="34" charset="0"/>
+                <a:ea typeface="Calibri" pitchFamily="34" charset="-122"/>
+                <a:cs typeface="Calibri" pitchFamily="34" charset="-120"/>
               </a:rPr>
               <a:t>The folder is called المستندات, so “folder not found”</a:t>
             </a:r>
-            <a:endParaRPr lang="en-US" sz="800" dirty="0"/>
-          </a:p>
-        </p:txBody>
-      </p:sp>
-      <p:sp>
-        <p:nvSpPr>
-          <p:cNvPr id="28" name="Shape 21"/>
-          <p:cNvSpPr/>
-          <p:nvPr/>
-        </p:nvSpPr>
-        <p:spPr>
-          <a:xfrm>
-            <a:off x="8577072" y="3140964"/>
-            <a:ext cx="128016" cy="0"/>
-          </a:xfrm>
-          <a:prstGeom prst="line">
-            <a:avLst/>
-          </a:prstGeom>
-          <a:noFill/>
-          <a:ln w="15875">
-            <a:solidFill>
-              <a:srgbClr val="111111"/>
-            </a:solidFill>
-            <a:prstDash val="solid"/>
-            <a:tailEnd type="triangle"/>
-          </a:ln>
-        </p:spPr>
+            <a:endParaRPr lang="en-US" sz="850" dirty="0"/>
+          </a:p>
+        </p:txBody>
+      </p:sp>
+      <p:sp>
+        <p:nvSpPr>
+          <p:cNvPr id="28" name="Text 21"/>
+          <p:cNvSpPr txBox="1"/>
+          <p:nvPr/>
+        </p:nvSpPr>
+        <p:spPr>
+          <a:xfrm>
+            <a:off x="8522208" y="2766060"/>
+            <a:ext cx="164592" cy="274320"/>
+          </a:xfrm>
+          <a:prstGeom prst="rect">
+            <a:avLst/>
+          </a:prstGeom>
+          <a:noFill/>
+          <a:ln/>
+        </p:spPr>
+        <p:txBody>
+          <a:bodyPr wrap="square" lIns="0" tIns="0" rIns="0" bIns="0" rtlCol="0" anchor="t"/>
+          <a:lstStyle/>
+          <a:p>
+            <a:pPr algn="ctr" indent="0" marL="0">
+              <a:lnSpc>
+                <a:spcPct val="100000"/>
+              </a:lnSpc>
+              <a:buNone/>
+            </a:pPr>
+            <a:r>
+              <a:rPr lang="en-US" sz="1600" dirty="0">
+                <a:solidFill>
+                  <a:srgbClr val="9AA3AF"/>
+                </a:solidFill>
+                <a:latin typeface="Calibri" pitchFamily="34" charset="0"/>
+                <a:ea typeface="Calibri" pitchFamily="34" charset="-122"/>
+                <a:cs typeface="Calibri" pitchFamily="34" charset="-120"/>
+              </a:rPr>
+              <a:t>›</a:t>
+            </a:r>
+            <a:endParaRPr lang="en-US" sz="1600" dirty="0"/>
+          </a:p>
+        </p:txBody>
       </p:sp>
       <p:pic>
         <p:nvPicPr>
@@ -1901,7 +1983,7 @@
         </p:blipFill>
         <p:spPr>
           <a:xfrm>
-            <a:off x="8732520" y="2514600"/>
+            <a:off x="8686800" y="2276856"/>
             <a:ext cx="2240280" cy="1252728"/>
           </a:xfrm>
           <a:prstGeom prst="rect">
@@ -1917,8 +1999,8 @@
         </p:nvSpPr>
         <p:spPr>
           <a:xfrm>
-            <a:off x="8732520" y="3794760"/>
-            <a:ext cx="2240280" cy="457200"/>
+            <a:off x="8686800" y="3557016"/>
+            <a:ext cx="2240280" cy="274320"/>
           </a:xfrm>
           <a:prstGeom prst="rect">
             <a:avLst/>
@@ -1937,17 +2019,17 @@
               <a:buNone/>
             </a:pPr>
             <a:r>
-              <a:rPr lang="en-US" sz="800" dirty="0">
-                <a:solidFill>
-                  <a:srgbClr val="444444"/>
-                </a:solidFill>
-                <a:latin typeface="Arial" pitchFamily="34" charset="0"/>
-                <a:ea typeface="Arial" pitchFamily="34" charset="-122"/>
-                <a:cs typeface="Arial" pitchFamily="34" charset="-120"/>
+              <a:rPr lang="en-US" sz="850" dirty="0">
+                <a:solidFill>
+                  <a:srgbClr val="5B6470"/>
+                </a:solidFill>
+                <a:latin typeface="Calibri" pitchFamily="34" charset="0"/>
+                <a:ea typeface="Calibri" pitchFamily="34" charset="-122"/>
+                <a:cs typeface="Calibri" pitchFamily="34" charset="-120"/>
               </a:rPr>
               <a:t>Same error at step 50, no PDFs saved</a:t>
             </a:r>
-            <a:endParaRPr lang="en-US" sz="800" dirty="0"/>
+            <a:endParaRPr lang="en-US" sz="850" dirty="0"/>
           </a:p>
         </p:txBody>
       </p:sp>
@@ -1959,13 +2041,17 @@
         </p:nvSpPr>
         <p:spPr>
           <a:xfrm>
-            <a:off x="11064240" y="2926080"/>
-            <a:ext cx="731520" cy="365760"/>
-          </a:xfrm>
-          <a:prstGeom prst="rect">
-            <a:avLst/>
-          </a:prstGeom>
-          <a:noFill/>
+            <a:off x="11018520" y="2743200"/>
+            <a:ext cx="822960" cy="365760"/>
+          </a:xfrm>
+          <a:prstGeom prst="roundRect">
+            <a:avLst>
+              <a:gd name="adj" fmla="val 20000"/>
+            </a:avLst>
+          </a:prstGeom>
+          <a:solidFill>
+            <a:srgbClr val="B03A2E"/>
+          </a:solidFill>
           <a:ln/>
         </p:spPr>
         <p:txBody>
@@ -1979,55 +2065,123 @@
               <a:buNone/>
             </a:pPr>
             <a:r>
-              <a:rPr lang="en-US" sz="1400" b="1" dirty="0">
-                <a:solidFill>
-                  <a:srgbClr val="B22222"/>
-                </a:solidFill>
-                <a:latin typeface="Arial" pitchFamily="34" charset="0"/>
-                <a:ea typeface="Arial" pitchFamily="34" charset="-122"/>
-                <a:cs typeface="Arial" pitchFamily="34" charset="-120"/>
+              <a:rPr lang="en-US" sz="1200" b="1" dirty="0">
+                <a:solidFill>
+                  <a:srgbClr val="FFFFFF"/>
+                </a:solidFill>
+                <a:latin typeface="Calibri" pitchFamily="34" charset="0"/>
+                <a:ea typeface="Calibri" pitchFamily="34" charset="-122"/>
+                <a:cs typeface="Calibri" pitchFamily="34" charset="-120"/>
               </a:rPr>
               <a:t>FAIL</a:t>
             </a:r>
-            <a:endParaRPr lang="en-US" sz="1400" dirty="0"/>
-          </a:p>
-        </p:txBody>
-      </p:sp>
-      <p:sp>
-        <p:nvSpPr>
-          <p:cNvPr id="32" name="Shape 24"/>
+            <a:endParaRPr lang="en-US" sz="1200" dirty="0"/>
+          </a:p>
+        </p:txBody>
+      </p:sp>
+      <p:sp>
+        <p:nvSpPr>
+          <p:cNvPr id="32" name="Text 24"/>
+          <p:cNvSpPr txBox="1"/>
+          <p:nvPr/>
+        </p:nvSpPr>
+        <p:spPr>
+          <a:xfrm>
+            <a:off x="274320" y="3977640"/>
+            <a:ext cx="3657600" cy="228600"/>
+          </a:xfrm>
+          <a:prstGeom prst="rect">
+            <a:avLst/>
+          </a:prstGeom>
+          <a:noFill/>
+          <a:ln/>
+        </p:spPr>
+        <p:txBody>
+          <a:bodyPr wrap="square" lIns="0" tIns="0" rIns="0" bIns="0" rtlCol="0" anchor="t"/>
+          <a:lstStyle/>
+          <a:p>
+            <a:pPr algn="l" indent="0" marL="0">
+              <a:lnSpc>
+                <a:spcPct val="100000"/>
+              </a:lnSpc>
+              <a:buNone/>
+            </a:pPr>
+            <a:r>
+              <a:rPr lang="en-US" sz="1000" b="1" dirty="0">
+                <a:solidFill>
+                  <a:srgbClr val="5B6470"/>
+                </a:solidFill>
+                <a:latin typeface="Calibri" pitchFamily="34" charset="0"/>
+                <a:ea typeface="Calibri" pitchFamily="34" charset="-122"/>
+                <a:cs typeface="Calibri" pitchFamily="34" charset="-120"/>
+              </a:rPr>
+              <a:t>How it works</a:t>
+            </a:r>
+            <a:endParaRPr lang="en-US" sz="1000" dirty="0"/>
+          </a:p>
+        </p:txBody>
+      </p:sp>
+      <p:sp>
+        <p:nvSpPr>
+          <p:cNvPr id="33" name="Shape 25"/>
           <p:cNvSpPr/>
           <p:nvPr/>
         </p:nvSpPr>
         <p:spPr>
           <a:xfrm>
-            <a:off x="320040" y="4434840"/>
-            <a:ext cx="1481328" cy="1325880"/>
-          </a:xfrm>
-          <a:prstGeom prst="rect">
-            <a:avLst/>
+            <a:off x="274320" y="4251960"/>
+            <a:ext cx="1481328" cy="1965960"/>
+          </a:xfrm>
+          <a:prstGeom prst="roundRect">
+            <a:avLst>
+              <a:gd name="adj" fmla="val 7407"/>
+            </a:avLst>
           </a:prstGeom>
           <a:solidFill>
-            <a:srgbClr val="FFFFFF"/>
+            <a:srgbClr val="F3F4F7"/>
           </a:solidFill>
-          <a:ln w="12700">
+          <a:ln w="9525">
             <a:solidFill>
-              <a:srgbClr val="777777"/>
+              <a:srgbClr val="D5D9E0"/>
             </a:solidFill>
             <a:prstDash val="solid"/>
           </a:ln>
         </p:spPr>
       </p:sp>
-      <p:sp>
-        <p:nvSpPr>
-          <p:cNvPr id="33" name="Text 25"/>
-          <p:cNvSpPr txBox="1"/>
-          <p:nvPr/>
-        </p:nvSpPr>
-        <p:spPr>
-          <a:xfrm>
-            <a:off x="411480" y="4544568"/>
-            <a:ext cx="1298448" cy="274320"/>
+      <p:pic>
+        <p:nvPicPr>
+          <p:cNvPr id="34" name="Image 6" descr="preencoded.png">    </p:cNvPr>
+          <p:cNvPicPr>
+            <a:picLocks noChangeAspect="1"/>
+          </p:cNvPicPr>
+          <p:nvPr/>
+        </p:nvPicPr>
+        <p:blipFill>
+          <a:blip r:embed="rId7"/>
+          <a:stretch>
+            <a:fillRect/>
+          </a:stretch>
+        </p:blipFill>
+        <p:spPr>
+          <a:xfrm>
+            <a:off x="740664" y="4416552"/>
+            <a:ext cx="548640" cy="548640"/>
+          </a:xfrm>
+          <a:prstGeom prst="rect">
+            <a:avLst/>
+          </a:prstGeom>
+        </p:spPr>
+      </p:pic>
+      <p:sp>
+        <p:nvSpPr>
+          <p:cNvPr id="35" name="Text 26"/>
+          <p:cNvSpPr txBox="1"/>
+          <p:nvPr/>
+        </p:nvSpPr>
+        <p:spPr>
+          <a:xfrm>
+            <a:off x="347472" y="5056632"/>
+            <a:ext cx="1335024" cy="292608"/>
           </a:xfrm>
           <a:prstGeom prst="rect">
             <a:avLst/>
@@ -2046,30 +2200,30 @@
               <a:buNone/>
             </a:pPr>
             <a:r>
-              <a:rPr lang="en-US" sz="1150" b="1" dirty="0">
-                <a:solidFill>
-                  <a:srgbClr val="111111"/>
-                </a:solidFill>
-                <a:latin typeface="Arial" pitchFamily="34" charset="0"/>
-                <a:ea typeface="Arial" pitchFamily="34" charset="-122"/>
-                <a:cs typeface="Arial" pitchFamily="34" charset="-120"/>
+              <a:rPr lang="en-US" sz="1100" b="1" dirty="0">
+                <a:solidFill>
+                  <a:srgbClr val="1F2A44"/>
+                </a:solidFill>
+                <a:latin typeface="Calibri" pitchFamily="34" charset="0"/>
+                <a:ea typeface="Calibri" pitchFamily="34" charset="-122"/>
+                <a:cs typeface="Calibri" pitchFamily="34" charset="-120"/>
               </a:rPr>
               <a:t>Tasks</a:t>
             </a:r>
-            <a:endParaRPr lang="en-US" sz="1150" dirty="0"/>
-          </a:p>
-        </p:txBody>
-      </p:sp>
-      <p:sp>
-        <p:nvSpPr>
-          <p:cNvPr id="34" name="Text 26"/>
-          <p:cNvSpPr txBox="1"/>
-          <p:nvPr/>
-        </p:nvSpPr>
-        <p:spPr>
-          <a:xfrm>
-            <a:off x="411480" y="4846320"/>
-            <a:ext cx="1298448" cy="868680"/>
+            <a:endParaRPr lang="en-US" sz="1100" dirty="0"/>
+          </a:p>
+        </p:txBody>
+      </p:sp>
+      <p:sp>
+        <p:nvSpPr>
+          <p:cNvPr id="36" name="Text 27"/>
+          <p:cNvSpPr txBox="1"/>
+          <p:nvPr/>
+        </p:nvSpPr>
+        <p:spPr>
+          <a:xfrm>
+            <a:off x="347472" y="5349240"/>
+            <a:ext cx="1335024" cy="822960"/>
           </a:xfrm>
           <a:prstGeom prst="rect">
             <a:avLst/>
@@ -2088,64 +2242,40 @@
               <a:buNone/>
             </a:pPr>
             <a:r>
-              <a:rPr lang="en-US" sz="900" dirty="0">
-                <a:solidFill>
-                  <a:srgbClr val="444444"/>
-                </a:solidFill>
-                <a:latin typeface="Arial" pitchFamily="34" charset="0"/>
-                <a:ea typeface="Arial" pitchFamily="34" charset="-122"/>
-                <a:cs typeface="Arial" pitchFamily="34" charset="-120"/>
+              <a:rPr lang="en-US" sz="850" dirty="0">
+                <a:solidFill>
+                  <a:srgbClr val="5B6470"/>
+                </a:solidFill>
+                <a:latin typeface="Calibri" pitchFamily="34" charset="0"/>
+                <a:ea typeface="Calibri" pitchFamily="34" charset="-122"/>
+                <a:cs typeface="Calibri" pitchFamily="34" charset="-120"/>
               </a:rPr>
               <a:t>171 tasks from OSWorld, ClawBench and Terminal-Bench, plus 50 new Arabic tasks</a:t>
             </a:r>
-            <a:endParaRPr lang="en-US" sz="900" dirty="0"/>
-          </a:p>
-        </p:txBody>
-      </p:sp>
-      <p:sp>
-        <p:nvSpPr>
-          <p:cNvPr id="35" name="Shape 27"/>
+            <a:endParaRPr lang="en-US" sz="850" dirty="0"/>
+          </a:p>
+        </p:txBody>
+      </p:sp>
+      <p:sp>
+        <p:nvSpPr>
+          <p:cNvPr id="37" name="Shape 28"/>
           <p:cNvSpPr/>
           <p:nvPr/>
         </p:nvSpPr>
         <p:spPr>
           <a:xfrm>
-            <a:off x="1819656" y="5097780"/>
-            <a:ext cx="182880" cy="0"/>
-          </a:xfrm>
-          <a:prstGeom prst="line">
-            <a:avLst/>
-          </a:prstGeom>
-          <a:noFill/>
-          <a:ln w="15875">
+            <a:off x="1783080" y="5143500"/>
+            <a:ext cx="164592" cy="182880"/>
+          </a:xfrm>
+          <a:prstGeom prst="rightArrow">
+            <a:avLst/>
+          </a:prstGeom>
+          <a:solidFill>
+            <a:srgbClr val="B9C2CF"/>
+          </a:solidFill>
+          <a:ln w="6350">
             <a:solidFill>
-              <a:srgbClr val="111111"/>
-            </a:solidFill>
-            <a:prstDash val="solid"/>
-            <a:tailEnd type="triangle"/>
-          </a:ln>
-        </p:spPr>
-      </p:sp>
-      <p:sp>
-        <p:nvSpPr>
-          <p:cNvPr id="36" name="Shape 28"/>
-          <p:cNvSpPr/>
-          <p:nvPr/>
-        </p:nvSpPr>
-        <p:spPr>
-          <a:xfrm>
-            <a:off x="2020824" y="4434840"/>
-            <a:ext cx="1481328" cy="1325880"/>
-          </a:xfrm>
-          <a:prstGeom prst="rect">
-            <a:avLst/>
-          </a:prstGeom>
-          <a:solidFill>
-            <a:srgbClr val="FFFFFF"/>
-          </a:solidFill>
-          <a:ln w="12700">
-            <a:solidFill>
-              <a:srgbClr val="777777"/>
+              <a:srgbClr val="B9C2CF"/>
             </a:solidFill>
             <a:prstDash val="solid"/>
           </a:ln>
@@ -2153,147 +2283,65 @@
       </p:sp>
       <p:sp>
         <p:nvSpPr>
-          <p:cNvPr id="37" name="Text 29"/>
-          <p:cNvSpPr txBox="1"/>
-          <p:nvPr/>
-        </p:nvSpPr>
-        <p:spPr>
-          <a:xfrm>
-            <a:off x="2112264" y="4544568"/>
-            <a:ext cx="1298448" cy="274320"/>
-          </a:xfrm>
-          <a:prstGeom prst="rect">
-            <a:avLst/>
-          </a:prstGeom>
-          <a:noFill/>
-          <a:ln/>
-        </p:spPr>
-        <p:txBody>
-          <a:bodyPr wrap="square" lIns="0" tIns="0" rIns="0" bIns="0" rtlCol="0" anchor="t"/>
-          <a:lstStyle/>
-          <a:p>
-            <a:pPr algn="ctr" indent="0" marL="0">
-              <a:lnSpc>
-                <a:spcPct val="100000"/>
-              </a:lnSpc>
-              <a:buNone/>
-            </a:pPr>
-            <a:r>
-              <a:rPr lang="en-US" sz="1150" b="1" dirty="0">
-                <a:solidFill>
-                  <a:srgbClr val="111111"/>
-                </a:solidFill>
-                <a:latin typeface="Arial" pitchFamily="34" charset="0"/>
-                <a:ea typeface="Arial" pitchFamily="34" charset="-122"/>
-                <a:cs typeface="Arial" pitchFamily="34" charset="-120"/>
-              </a:rPr>
-              <a:t>Translation</a:t>
-            </a:r>
-            <a:endParaRPr lang="en-US" sz="1150" dirty="0"/>
-          </a:p>
-        </p:txBody>
-      </p:sp>
-      <p:sp>
-        <p:nvSpPr>
-          <p:cNvPr id="38" name="Text 30"/>
-          <p:cNvSpPr txBox="1"/>
-          <p:nvPr/>
-        </p:nvSpPr>
-        <p:spPr>
-          <a:xfrm>
-            <a:off x="2112264" y="4846320"/>
-            <a:ext cx="1298448" cy="868680"/>
-          </a:xfrm>
-          <a:prstGeom prst="rect">
-            <a:avLst/>
-          </a:prstGeom>
-          <a:noFill/>
-          <a:ln/>
-        </p:spPr>
-        <p:txBody>
-          <a:bodyPr wrap="square" lIns="0" tIns="0" rIns="0" bIns="0" rtlCol="0" anchor="t"/>
-          <a:lstStyle/>
-          <a:p>
-            <a:pPr algn="ctr" indent="0" marL="0">
-              <a:lnSpc>
-                <a:spcPct val="105000"/>
-              </a:lnSpc>
-              <a:buNone/>
-            </a:pPr>
-            <a:r>
-              <a:rPr lang="en-US" sz="900" dirty="0">
-                <a:solidFill>
-                  <a:srgbClr val="444444"/>
-                </a:solidFill>
-                <a:latin typeface="Arial" pitchFamily="34" charset="0"/>
-                <a:ea typeface="Arial" pitchFamily="34" charset="-122"/>
-                <a:cs typeface="Arial" pitchFamily="34" charset="-120"/>
-              </a:rPr>
-              <a:t>Translated by humans to MSA and 5 dialects: Egyptian, Syrian, Qatari, Sudanese, Algerian</a:t>
-            </a:r>
-            <a:endParaRPr lang="en-US" sz="900" dirty="0"/>
-          </a:p>
-        </p:txBody>
-      </p:sp>
-      <p:sp>
-        <p:nvSpPr>
-          <p:cNvPr id="39" name="Shape 31"/>
+          <p:cNvPr id="38" name="Shape 29"/>
           <p:cNvSpPr/>
           <p:nvPr/>
         </p:nvSpPr>
         <p:spPr>
           <a:xfrm>
-            <a:off x="3520440" y="5097780"/>
-            <a:ext cx="182880" cy="0"/>
-          </a:xfrm>
-          <a:prstGeom prst="line">
-            <a:avLst/>
-          </a:prstGeom>
-          <a:noFill/>
-          <a:ln w="15875">
+            <a:off x="1975104" y="4251960"/>
+            <a:ext cx="1481328" cy="1965960"/>
+          </a:xfrm>
+          <a:prstGeom prst="roundRect">
+            <a:avLst>
+              <a:gd name="adj" fmla="val 7407"/>
+            </a:avLst>
+          </a:prstGeom>
+          <a:solidFill>
+            <a:srgbClr val="F3F4F7"/>
+          </a:solidFill>
+          <a:ln w="9525">
             <a:solidFill>
-              <a:srgbClr val="111111"/>
-            </a:solidFill>
-            <a:prstDash val="solid"/>
-            <a:tailEnd type="triangle"/>
-          </a:ln>
-        </p:spPr>
-      </p:sp>
-      <p:sp>
-        <p:nvSpPr>
-          <p:cNvPr id="40" name="Shape 32"/>
-          <p:cNvSpPr/>
-          <p:nvPr/>
-        </p:nvSpPr>
-        <p:spPr>
-          <a:xfrm>
-            <a:off x="3721608" y="4434840"/>
-            <a:ext cx="1481328" cy="1325880"/>
-          </a:xfrm>
-          <a:prstGeom prst="rect">
-            <a:avLst/>
-          </a:prstGeom>
-          <a:solidFill>
-            <a:srgbClr val="FFFFFF"/>
-          </a:solidFill>
-          <a:ln w="12700">
-            <a:solidFill>
-              <a:srgbClr val="777777"/>
+              <a:srgbClr val="D5D9E0"/>
             </a:solidFill>
             <a:prstDash val="solid"/>
           </a:ln>
         </p:spPr>
       </p:sp>
-      <p:sp>
-        <p:nvSpPr>
-          <p:cNvPr id="41" name="Text 33"/>
-          <p:cNvSpPr txBox="1"/>
-          <p:nvPr/>
-        </p:nvSpPr>
-        <p:spPr>
-          <a:xfrm>
-            <a:off x="3813048" y="4544568"/>
-            <a:ext cx="1298448" cy="274320"/>
+      <p:pic>
+        <p:nvPicPr>
+          <p:cNvPr id="39" name="Image 7" descr="preencoded.png">    </p:cNvPr>
+          <p:cNvPicPr>
+            <a:picLocks noChangeAspect="1"/>
+          </p:cNvPicPr>
+          <p:nvPr/>
+        </p:nvPicPr>
+        <p:blipFill>
+          <a:blip r:embed="rId8"/>
+          <a:stretch>
+            <a:fillRect/>
+          </a:stretch>
+        </p:blipFill>
+        <p:spPr>
+          <a:xfrm>
+            <a:off x="2441448" y="4416552"/>
+            <a:ext cx="548640" cy="548640"/>
+          </a:xfrm>
+          <a:prstGeom prst="rect">
+            <a:avLst/>
+          </a:prstGeom>
+        </p:spPr>
+      </p:pic>
+      <p:sp>
+        <p:nvSpPr>
+          <p:cNvPr id="40" name="Text 30"/>
+          <p:cNvSpPr txBox="1"/>
+          <p:nvPr/>
+        </p:nvSpPr>
+        <p:spPr>
+          <a:xfrm>
+            <a:off x="2048256" y="5056632"/>
+            <a:ext cx="1335024" cy="292608"/>
           </a:xfrm>
           <a:prstGeom prst="rect">
             <a:avLst/>
@@ -2312,30 +2360,30 @@
               <a:buNone/>
             </a:pPr>
             <a:r>
-              <a:rPr lang="en-US" sz="1150" b="1" dirty="0">
-                <a:solidFill>
-                  <a:srgbClr val="111111"/>
-                </a:solidFill>
-                <a:latin typeface="Arial" pitchFamily="34" charset="0"/>
-                <a:ea typeface="Arial" pitchFamily="34" charset="-122"/>
-                <a:cs typeface="Arial" pitchFamily="34" charset="-120"/>
-              </a:rPr>
-              <a:t>Two machines</a:t>
-            </a:r>
-            <a:endParaRPr lang="en-US" sz="1150" dirty="0"/>
-          </a:p>
-        </p:txBody>
-      </p:sp>
-      <p:sp>
-        <p:nvSpPr>
-          <p:cNvPr id="42" name="Text 34"/>
-          <p:cNvSpPr txBox="1"/>
-          <p:nvPr/>
-        </p:nvSpPr>
-        <p:spPr>
-          <a:xfrm>
-            <a:off x="3813048" y="4846320"/>
-            <a:ext cx="1298448" cy="868680"/>
+              <a:rPr lang="en-US" sz="1100" b="1" dirty="0">
+                <a:solidFill>
+                  <a:srgbClr val="1F2A44"/>
+                </a:solidFill>
+                <a:latin typeface="Calibri" pitchFamily="34" charset="0"/>
+                <a:ea typeface="Calibri" pitchFamily="34" charset="-122"/>
+                <a:cs typeface="Calibri" pitchFamily="34" charset="-120"/>
+              </a:rPr>
+              <a:t>Translation</a:t>
+            </a:r>
+            <a:endParaRPr lang="en-US" sz="1100" dirty="0"/>
+          </a:p>
+        </p:txBody>
+      </p:sp>
+      <p:sp>
+        <p:nvSpPr>
+          <p:cNvPr id="41" name="Text 31"/>
+          <p:cNvSpPr txBox="1"/>
+          <p:nvPr/>
+        </p:nvSpPr>
+        <p:spPr>
+          <a:xfrm>
+            <a:off x="2048256" y="5349240"/>
+            <a:ext cx="1335024" cy="822960"/>
           </a:xfrm>
           <a:prstGeom prst="rect">
             <a:avLst/>
@@ -2354,84 +2402,40 @@
               <a:buNone/>
             </a:pPr>
             <a:r>
-              <a:rPr lang="en-US" sz="900" dirty="0">
-                <a:solidFill>
-                  <a:srgbClr val="444444"/>
-                </a:solidFill>
-                <a:latin typeface="Arial" pitchFamily="34" charset="0"/>
-                <a:ea typeface="Arial" pitchFamily="34" charset="-122"/>
-                <a:cs typeface="Arial" pitchFamily="34" charset="-120"/>
-              </a:rPr>
-              <a:t>English VM</a:t>
-            </a:r>
-            <a:endParaRPr lang="en-US" sz="900" dirty="0"/>
-          </a:p>
-          <a:p>
-            <a:pPr algn="ctr" indent="0" marL="0">
-              <a:lnSpc>
-                <a:spcPct val="105000"/>
-              </a:lnSpc>
-              <a:buNone/>
-            </a:pPr>
-            <a:r>
-              <a:rPr lang="en-US" sz="900" dirty="0">
-                <a:solidFill>
-                  <a:srgbClr val="444444"/>
-                </a:solidFill>
-                <a:latin typeface="Arial" pitchFamily="34" charset="0"/>
-                <a:ea typeface="Arial" pitchFamily="34" charset="-122"/>
-                <a:cs typeface="Arial" pitchFamily="34" charset="-120"/>
-              </a:rPr>
-              <a:t>Arabic VM</a:t>
-            </a:r>
-            <a:endParaRPr lang="en-US" sz="900" dirty="0"/>
-          </a:p>
-        </p:txBody>
-      </p:sp>
-      <p:sp>
-        <p:nvSpPr>
-          <p:cNvPr id="43" name="Shape 35"/>
+              <a:rPr lang="en-US" sz="850" dirty="0">
+                <a:solidFill>
+                  <a:srgbClr val="5B6470"/>
+                </a:solidFill>
+                <a:latin typeface="Calibri" pitchFamily="34" charset="0"/>
+                <a:ea typeface="Calibri" pitchFamily="34" charset="-122"/>
+                <a:cs typeface="Calibri" pitchFamily="34" charset="-120"/>
+              </a:rPr>
+              <a:t>Translated by humans to MSA and 5 dialects: Egyptian, Syrian, Qatari, Sudanese, Algerian</a:t>
+            </a:r>
+            <a:endParaRPr lang="en-US" sz="850" dirty="0"/>
+          </a:p>
+        </p:txBody>
+      </p:sp>
+      <p:sp>
+        <p:nvSpPr>
+          <p:cNvPr id="42" name="Shape 32"/>
           <p:cNvSpPr/>
           <p:nvPr/>
         </p:nvSpPr>
         <p:spPr>
           <a:xfrm>
-            <a:off x="5221224" y="5097780"/>
-            <a:ext cx="182880" cy="0"/>
-          </a:xfrm>
-          <a:prstGeom prst="line">
-            <a:avLst/>
-          </a:prstGeom>
-          <a:noFill/>
-          <a:ln w="15875">
+            <a:off x="3483864" y="5143500"/>
+            <a:ext cx="164592" cy="182880"/>
+          </a:xfrm>
+          <a:prstGeom prst="rightArrow">
+            <a:avLst/>
+          </a:prstGeom>
+          <a:solidFill>
+            <a:srgbClr val="B9C2CF"/>
+          </a:solidFill>
+          <a:ln w="6350">
             <a:solidFill>
-              <a:srgbClr val="111111"/>
-            </a:solidFill>
-            <a:prstDash val="solid"/>
-            <a:tailEnd type="triangle"/>
-          </a:ln>
-        </p:spPr>
-      </p:sp>
-      <p:sp>
-        <p:nvSpPr>
-          <p:cNvPr id="44" name="Shape 36"/>
-          <p:cNvSpPr/>
-          <p:nvPr/>
-        </p:nvSpPr>
-        <p:spPr>
-          <a:xfrm>
-            <a:off x="5422392" y="4434840"/>
-            <a:ext cx="1481328" cy="1325880"/>
-          </a:xfrm>
-          <a:prstGeom prst="rect">
-            <a:avLst/>
-          </a:prstGeom>
-          <a:solidFill>
-            <a:srgbClr val="FFFFFF"/>
-          </a:solidFill>
-          <a:ln w="12700">
-            <a:solidFill>
-              <a:srgbClr val="777777"/>
+              <a:srgbClr val="B9C2CF"/>
             </a:solidFill>
             <a:prstDash val="solid"/>
           </a:ln>
@@ -2439,147 +2443,65 @@
       </p:sp>
       <p:sp>
         <p:nvSpPr>
-          <p:cNvPr id="45" name="Text 37"/>
-          <p:cNvSpPr txBox="1"/>
-          <p:nvPr/>
-        </p:nvSpPr>
-        <p:spPr>
-          <a:xfrm>
-            <a:off x="5513832" y="4544568"/>
-            <a:ext cx="1298448" cy="274320"/>
-          </a:xfrm>
-          <a:prstGeom prst="rect">
-            <a:avLst/>
-          </a:prstGeom>
-          <a:noFill/>
-          <a:ln/>
-        </p:spPr>
-        <p:txBody>
-          <a:bodyPr wrap="square" lIns="0" tIns="0" rIns="0" bIns="0" rtlCol="0" anchor="t"/>
-          <a:lstStyle/>
-          <a:p>
-            <a:pPr algn="ctr" indent="0" marL="0">
-              <a:lnSpc>
-                <a:spcPct val="100000"/>
-              </a:lnSpc>
-              <a:buNone/>
-            </a:pPr>
-            <a:r>
-              <a:rPr lang="en-US" sz="1150" b="1" dirty="0">
-                <a:solidFill>
-                  <a:srgbClr val="111111"/>
-                </a:solidFill>
-                <a:latin typeface="Arial" pitchFamily="34" charset="0"/>
-                <a:ea typeface="Arial" pitchFamily="34" charset="-122"/>
-                <a:cs typeface="Arial" pitchFamily="34" charset="-120"/>
-              </a:rPr>
-              <a:t>Agent</a:t>
-            </a:r>
-            <a:endParaRPr lang="en-US" sz="1150" dirty="0"/>
-          </a:p>
-        </p:txBody>
-      </p:sp>
-      <p:sp>
-        <p:nvSpPr>
-          <p:cNvPr id="46" name="Text 38"/>
-          <p:cNvSpPr txBox="1"/>
-          <p:nvPr/>
-        </p:nvSpPr>
-        <p:spPr>
-          <a:xfrm>
-            <a:off x="5513832" y="4846320"/>
-            <a:ext cx="1298448" cy="868680"/>
-          </a:xfrm>
-          <a:prstGeom prst="rect">
-            <a:avLst/>
-          </a:prstGeom>
-          <a:noFill/>
-          <a:ln/>
-        </p:spPr>
-        <p:txBody>
-          <a:bodyPr wrap="square" lIns="0" tIns="0" rIns="0" bIns="0" rtlCol="0" anchor="t"/>
-          <a:lstStyle/>
-          <a:p>
-            <a:pPr algn="ctr" indent="0" marL="0">
-              <a:lnSpc>
-                <a:spcPct val="105000"/>
-              </a:lnSpc>
-              <a:buNone/>
-            </a:pPr>
-            <a:r>
-              <a:rPr lang="en-US" sz="900" dirty="0">
-                <a:solidFill>
-                  <a:srgbClr val="444444"/>
-                </a:solidFill>
-                <a:latin typeface="Arial" pitchFamily="34" charset="0"/>
-                <a:ea typeface="Arial" pitchFamily="34" charset="-122"/>
-                <a:cs typeface="Arial" pitchFamily="34" charset="-120"/>
-              </a:rPr>
-              <a:t>Sees screenshots and navigates with the mouse and keyboard</a:t>
-            </a:r>
-            <a:endParaRPr lang="en-US" sz="900" dirty="0"/>
-          </a:p>
-        </p:txBody>
-      </p:sp>
-      <p:sp>
-        <p:nvSpPr>
-          <p:cNvPr id="47" name="Shape 39"/>
+          <p:cNvPr id="43" name="Shape 33"/>
           <p:cNvSpPr/>
           <p:nvPr/>
         </p:nvSpPr>
         <p:spPr>
           <a:xfrm>
-            <a:off x="6922008" y="5097780"/>
-            <a:ext cx="182880" cy="0"/>
-          </a:xfrm>
-          <a:prstGeom prst="line">
-            <a:avLst/>
-          </a:prstGeom>
-          <a:noFill/>
-          <a:ln w="15875">
+            <a:off x="3675888" y="4251960"/>
+            <a:ext cx="1481328" cy="1965960"/>
+          </a:xfrm>
+          <a:prstGeom prst="roundRect">
+            <a:avLst>
+              <a:gd name="adj" fmla="val 7407"/>
+            </a:avLst>
+          </a:prstGeom>
+          <a:solidFill>
+            <a:srgbClr val="F3F4F7"/>
+          </a:solidFill>
+          <a:ln w="9525">
             <a:solidFill>
-              <a:srgbClr val="111111"/>
-            </a:solidFill>
-            <a:prstDash val="solid"/>
-            <a:tailEnd type="triangle"/>
-          </a:ln>
-        </p:spPr>
-      </p:sp>
-      <p:sp>
-        <p:nvSpPr>
-          <p:cNvPr id="48" name="Shape 40"/>
-          <p:cNvSpPr/>
-          <p:nvPr/>
-        </p:nvSpPr>
-        <p:spPr>
-          <a:xfrm>
-            <a:off x="7123176" y="4434840"/>
-            <a:ext cx="1481328" cy="1325880"/>
-          </a:xfrm>
-          <a:prstGeom prst="rect">
-            <a:avLst/>
-          </a:prstGeom>
-          <a:solidFill>
-            <a:srgbClr val="FFFFFF"/>
-          </a:solidFill>
-          <a:ln w="12700">
-            <a:solidFill>
-              <a:srgbClr val="777777"/>
+              <a:srgbClr val="D5D9E0"/>
             </a:solidFill>
             <a:prstDash val="solid"/>
           </a:ln>
         </p:spPr>
       </p:sp>
-      <p:sp>
-        <p:nvSpPr>
-          <p:cNvPr id="49" name="Text 41"/>
-          <p:cNvSpPr txBox="1"/>
-          <p:nvPr/>
-        </p:nvSpPr>
-        <p:spPr>
-          <a:xfrm>
-            <a:off x="7214616" y="4544568"/>
-            <a:ext cx="1298448" cy="274320"/>
+      <p:pic>
+        <p:nvPicPr>
+          <p:cNvPr id="44" name="Image 8" descr="preencoded.png">    </p:cNvPr>
+          <p:cNvPicPr>
+            <a:picLocks noChangeAspect="1"/>
+          </p:cNvPicPr>
+          <p:nvPr/>
+        </p:nvPicPr>
+        <p:blipFill>
+          <a:blip r:embed="rId9"/>
+          <a:stretch>
+            <a:fillRect/>
+          </a:stretch>
+        </p:blipFill>
+        <p:spPr>
+          <a:xfrm>
+            <a:off x="4142232" y="4416552"/>
+            <a:ext cx="548640" cy="548640"/>
+          </a:xfrm>
+          <a:prstGeom prst="rect">
+            <a:avLst/>
+          </a:prstGeom>
+        </p:spPr>
+      </p:pic>
+      <p:sp>
+        <p:nvSpPr>
+          <p:cNvPr id="45" name="Text 34"/>
+          <p:cNvSpPr txBox="1"/>
+          <p:nvPr/>
+        </p:nvSpPr>
+        <p:spPr>
+          <a:xfrm>
+            <a:off x="3749040" y="5056632"/>
+            <a:ext cx="1335024" cy="292608"/>
           </a:xfrm>
           <a:prstGeom prst="rect">
             <a:avLst/>
@@ -2598,30 +2520,30 @@
               <a:buNone/>
             </a:pPr>
             <a:r>
-              <a:rPr lang="en-US" sz="1150" b="1" dirty="0">
-                <a:solidFill>
-                  <a:srgbClr val="111111"/>
-                </a:solidFill>
-                <a:latin typeface="Arial" pitchFamily="34" charset="0"/>
-                <a:ea typeface="Arial" pitchFamily="34" charset="-122"/>
-                <a:cs typeface="Arial" pitchFamily="34" charset="-120"/>
-              </a:rPr>
-              <a:t>Evidence</a:t>
-            </a:r>
-            <a:endParaRPr lang="en-US" sz="1150" dirty="0"/>
-          </a:p>
-        </p:txBody>
-      </p:sp>
-      <p:sp>
-        <p:nvSpPr>
-          <p:cNvPr id="50" name="Text 42"/>
-          <p:cNvSpPr txBox="1"/>
-          <p:nvPr/>
-        </p:nvSpPr>
-        <p:spPr>
-          <a:xfrm>
-            <a:off x="7214616" y="4846320"/>
-            <a:ext cx="1298448" cy="868680"/>
+              <a:rPr lang="en-US" sz="1100" b="1" dirty="0">
+                <a:solidFill>
+                  <a:srgbClr val="1F2A44"/>
+                </a:solidFill>
+                <a:latin typeface="Calibri" pitchFamily="34" charset="0"/>
+                <a:ea typeface="Calibri" pitchFamily="34" charset="-122"/>
+                <a:cs typeface="Calibri" pitchFamily="34" charset="-120"/>
+              </a:rPr>
+              <a:t>Two machines</a:t>
+            </a:r>
+            <a:endParaRPr lang="en-US" sz="1100" dirty="0"/>
+          </a:p>
+        </p:txBody>
+      </p:sp>
+      <p:sp>
+        <p:nvSpPr>
+          <p:cNvPr id="46" name="Text 35"/>
+          <p:cNvSpPr txBox="1"/>
+          <p:nvPr/>
+        </p:nvSpPr>
+        <p:spPr>
+          <a:xfrm>
+            <a:off x="3749040" y="5349240"/>
+            <a:ext cx="1335024" cy="822960"/>
           </a:xfrm>
           <a:prstGeom prst="rect">
             <a:avLst/>
@@ -2640,64 +2562,60 @@
               <a:buNone/>
             </a:pPr>
             <a:r>
-              <a:rPr lang="en-US" sz="900" dirty="0">
-                <a:solidFill>
-                  <a:srgbClr val="444444"/>
-                </a:solidFill>
-                <a:latin typeface="Arial" pitchFamily="34" charset="0"/>
-                <a:ea typeface="Arial" pitchFamily="34" charset="-122"/>
-                <a:cs typeface="Arial" pitchFamily="34" charset="-120"/>
-              </a:rPr>
-              <a:t>Everything is recorded. The final request is captured but not sent.</a:t>
-            </a:r>
-            <a:endParaRPr lang="en-US" sz="900" dirty="0"/>
-          </a:p>
-        </p:txBody>
-      </p:sp>
-      <p:sp>
-        <p:nvSpPr>
-          <p:cNvPr id="51" name="Shape 43"/>
+              <a:rPr lang="en-US" sz="850" dirty="0">
+                <a:solidFill>
+                  <a:srgbClr val="5B6470"/>
+                </a:solidFill>
+                <a:latin typeface="Calibri" pitchFamily="34" charset="0"/>
+                <a:ea typeface="Calibri" pitchFamily="34" charset="-122"/>
+                <a:cs typeface="Calibri" pitchFamily="34" charset="-120"/>
+              </a:rPr>
+              <a:t>English VM</a:t>
+            </a:r>
+            <a:endParaRPr lang="en-US" sz="850" dirty="0"/>
+          </a:p>
+          <a:p>
+            <a:pPr algn="ctr" indent="0" marL="0">
+              <a:lnSpc>
+                <a:spcPct val="105000"/>
+              </a:lnSpc>
+              <a:buNone/>
+            </a:pPr>
+            <a:r>
+              <a:rPr lang="en-US" sz="850" dirty="0">
+                <a:solidFill>
+                  <a:srgbClr val="5B6470"/>
+                </a:solidFill>
+                <a:latin typeface="Calibri" pitchFamily="34" charset="0"/>
+                <a:ea typeface="Calibri" pitchFamily="34" charset="-122"/>
+                <a:cs typeface="Calibri" pitchFamily="34" charset="-120"/>
+              </a:rPr>
+              <a:t>Arabic VM</a:t>
+            </a:r>
+            <a:endParaRPr lang="en-US" sz="850" dirty="0"/>
+          </a:p>
+        </p:txBody>
+      </p:sp>
+      <p:sp>
+        <p:nvSpPr>
+          <p:cNvPr id="47" name="Shape 36"/>
           <p:cNvSpPr/>
           <p:nvPr/>
         </p:nvSpPr>
         <p:spPr>
           <a:xfrm>
-            <a:off x="8622792" y="5097780"/>
-            <a:ext cx="182880" cy="0"/>
-          </a:xfrm>
-          <a:prstGeom prst="line">
-            <a:avLst/>
-          </a:prstGeom>
-          <a:noFill/>
-          <a:ln w="15875">
+            <a:off x="5184648" y="5143500"/>
+            <a:ext cx="164592" cy="182880"/>
+          </a:xfrm>
+          <a:prstGeom prst="rightArrow">
+            <a:avLst/>
+          </a:prstGeom>
+          <a:solidFill>
+            <a:srgbClr val="B9C2CF"/>
+          </a:solidFill>
+          <a:ln w="6350">
             <a:solidFill>
-              <a:srgbClr val="111111"/>
-            </a:solidFill>
-            <a:prstDash val="solid"/>
-            <a:tailEnd type="triangle"/>
-          </a:ln>
-        </p:spPr>
-      </p:sp>
-      <p:sp>
-        <p:nvSpPr>
-          <p:cNvPr id="52" name="Shape 44"/>
-          <p:cNvSpPr/>
-          <p:nvPr/>
-        </p:nvSpPr>
-        <p:spPr>
-          <a:xfrm>
-            <a:off x="8823960" y="4434840"/>
-            <a:ext cx="1481328" cy="1325880"/>
-          </a:xfrm>
-          <a:prstGeom prst="rect">
-            <a:avLst/>
-          </a:prstGeom>
-          <a:solidFill>
-            <a:srgbClr val="FFFFFF"/>
-          </a:solidFill>
-          <a:ln w="12700">
-            <a:solidFill>
-              <a:srgbClr val="777777"/>
+              <a:srgbClr val="B9C2CF"/>
             </a:solidFill>
             <a:prstDash val="solid"/>
           </a:ln>
@@ -2705,147 +2623,65 @@
       </p:sp>
       <p:sp>
         <p:nvSpPr>
-          <p:cNvPr id="53" name="Text 45"/>
-          <p:cNvSpPr txBox="1"/>
-          <p:nvPr/>
-        </p:nvSpPr>
-        <p:spPr>
-          <a:xfrm>
-            <a:off x="8915400" y="4544568"/>
-            <a:ext cx="1298448" cy="274320"/>
-          </a:xfrm>
-          <a:prstGeom prst="rect">
-            <a:avLst/>
-          </a:prstGeom>
-          <a:noFill/>
-          <a:ln/>
-        </p:spPr>
-        <p:txBody>
-          <a:bodyPr wrap="square" lIns="0" tIns="0" rIns="0" bIns="0" rtlCol="0" anchor="t"/>
-          <a:lstStyle/>
-          <a:p>
-            <a:pPr algn="ctr" indent="0" marL="0">
-              <a:lnSpc>
-                <a:spcPct val="100000"/>
-              </a:lnSpc>
-              <a:buNone/>
-            </a:pPr>
-            <a:r>
-              <a:rPr lang="en-US" sz="1150" b="1" dirty="0">
-                <a:solidFill>
-                  <a:srgbClr val="111111"/>
-                </a:solidFill>
-                <a:latin typeface="Arial" pitchFamily="34" charset="0"/>
-                <a:ea typeface="Arial" pitchFamily="34" charset="-122"/>
-                <a:cs typeface="Arial" pitchFamily="34" charset="-120"/>
-              </a:rPr>
-              <a:t>Checker</a:t>
-            </a:r>
-            <a:endParaRPr lang="en-US" sz="1150" dirty="0"/>
-          </a:p>
-        </p:txBody>
-      </p:sp>
-      <p:sp>
-        <p:nvSpPr>
-          <p:cNvPr id="54" name="Text 46"/>
-          <p:cNvSpPr txBox="1"/>
-          <p:nvPr/>
-        </p:nvSpPr>
-        <p:spPr>
-          <a:xfrm>
-            <a:off x="8915400" y="4846320"/>
-            <a:ext cx="1298448" cy="868680"/>
-          </a:xfrm>
-          <a:prstGeom prst="rect">
-            <a:avLst/>
-          </a:prstGeom>
-          <a:noFill/>
-          <a:ln/>
-        </p:spPr>
-        <p:txBody>
-          <a:bodyPr wrap="square" lIns="0" tIns="0" rIns="0" bIns="0" rtlCol="0" anchor="t"/>
-          <a:lstStyle/>
-          <a:p>
-            <a:pPr algn="ctr" indent="0" marL="0">
-              <a:lnSpc>
-                <a:spcPct val="105000"/>
-              </a:lnSpc>
-              <a:buNone/>
-            </a:pPr>
-            <a:r>
-              <a:rPr lang="en-US" sz="900" dirty="0">
-                <a:solidFill>
-                  <a:srgbClr val="444444"/>
-                </a:solidFill>
-                <a:latin typeface="Arial" pitchFamily="34" charset="0"/>
-                <a:ea typeface="Arial" pitchFamily="34" charset="-122"/>
-                <a:cs typeface="Arial" pitchFamily="34" charset="-120"/>
-              </a:rPr>
-              <a:t>Checks the recorded evidence. No LLM judge.</a:t>
-            </a:r>
-            <a:endParaRPr lang="en-US" sz="900" dirty="0"/>
-          </a:p>
-        </p:txBody>
-      </p:sp>
-      <p:sp>
-        <p:nvSpPr>
-          <p:cNvPr id="55" name="Shape 47"/>
+          <p:cNvPr id="48" name="Shape 37"/>
           <p:cNvSpPr/>
           <p:nvPr/>
         </p:nvSpPr>
         <p:spPr>
           <a:xfrm>
-            <a:off x="10323576" y="5097780"/>
-            <a:ext cx="182880" cy="0"/>
-          </a:xfrm>
-          <a:prstGeom prst="line">
-            <a:avLst/>
-          </a:prstGeom>
-          <a:noFill/>
-          <a:ln w="15875">
+            <a:off x="5376672" y="4251960"/>
+            <a:ext cx="1481328" cy="1965960"/>
+          </a:xfrm>
+          <a:prstGeom prst="roundRect">
+            <a:avLst>
+              <a:gd name="adj" fmla="val 7407"/>
+            </a:avLst>
+          </a:prstGeom>
+          <a:solidFill>
+            <a:srgbClr val="F3F4F7"/>
+          </a:solidFill>
+          <a:ln w="9525">
             <a:solidFill>
-              <a:srgbClr val="111111"/>
-            </a:solidFill>
-            <a:prstDash val="solid"/>
-            <a:tailEnd type="triangle"/>
-          </a:ln>
-        </p:spPr>
-      </p:sp>
-      <p:sp>
-        <p:nvSpPr>
-          <p:cNvPr id="56" name="Shape 48"/>
-          <p:cNvSpPr/>
-          <p:nvPr/>
-        </p:nvSpPr>
-        <p:spPr>
-          <a:xfrm>
-            <a:off x="10524744" y="4434840"/>
-            <a:ext cx="1481328" cy="1325880"/>
-          </a:xfrm>
-          <a:prstGeom prst="rect">
-            <a:avLst/>
-          </a:prstGeom>
-          <a:solidFill>
-            <a:srgbClr val="FFFFFF"/>
-          </a:solidFill>
-          <a:ln w="12700">
-            <a:solidFill>
-              <a:srgbClr val="777777"/>
+              <a:srgbClr val="D5D9E0"/>
             </a:solidFill>
             <a:prstDash val="solid"/>
           </a:ln>
         </p:spPr>
       </p:sp>
-      <p:sp>
-        <p:nvSpPr>
-          <p:cNvPr id="57" name="Text 49"/>
-          <p:cNvSpPr txBox="1"/>
-          <p:nvPr/>
-        </p:nvSpPr>
-        <p:spPr>
-          <a:xfrm>
-            <a:off x="10616184" y="4544568"/>
-            <a:ext cx="1298448" cy="274320"/>
+      <p:pic>
+        <p:nvPicPr>
+          <p:cNvPr id="49" name="Image 9" descr="preencoded.png">    </p:cNvPr>
+          <p:cNvPicPr>
+            <a:picLocks noChangeAspect="1"/>
+          </p:cNvPicPr>
+          <p:nvPr/>
+        </p:nvPicPr>
+        <p:blipFill>
+          <a:blip r:embed="rId10"/>
+          <a:stretch>
+            <a:fillRect/>
+          </a:stretch>
+        </p:blipFill>
+        <p:spPr>
+          <a:xfrm>
+            <a:off x="5843016" y="4416552"/>
+            <a:ext cx="548640" cy="548640"/>
+          </a:xfrm>
+          <a:prstGeom prst="rect">
+            <a:avLst/>
+          </a:prstGeom>
+        </p:spPr>
+      </p:pic>
+      <p:sp>
+        <p:nvSpPr>
+          <p:cNvPr id="50" name="Text 38"/>
+          <p:cNvSpPr txBox="1"/>
+          <p:nvPr/>
+        </p:nvSpPr>
+        <p:spPr>
+          <a:xfrm>
+            <a:off x="5449824" y="5056632"/>
+            <a:ext cx="1335024" cy="292608"/>
           </a:xfrm>
           <a:prstGeom prst="rect">
             <a:avLst/>
@@ -2864,30 +2700,510 @@
               <a:buNone/>
             </a:pPr>
             <a:r>
-              <a:rPr lang="en-US" sz="1150" b="1" dirty="0">
-                <a:solidFill>
-                  <a:srgbClr val="111111"/>
-                </a:solidFill>
-                <a:latin typeface="Arial" pitchFamily="34" charset="0"/>
-                <a:ea typeface="Arial" pitchFamily="34" charset="-122"/>
-                <a:cs typeface="Arial" pitchFamily="34" charset="-120"/>
+              <a:rPr lang="en-US" sz="1100" b="1" dirty="0">
+                <a:solidFill>
+                  <a:srgbClr val="1F2A44"/>
+                </a:solidFill>
+                <a:latin typeface="Calibri" pitchFamily="34" charset="0"/>
+                <a:ea typeface="Calibri" pitchFamily="34" charset="-122"/>
+                <a:cs typeface="Calibri" pitchFamily="34" charset="-120"/>
+              </a:rPr>
+              <a:t>Agent</a:t>
+            </a:r>
+            <a:endParaRPr lang="en-US" sz="1100" dirty="0"/>
+          </a:p>
+        </p:txBody>
+      </p:sp>
+      <p:sp>
+        <p:nvSpPr>
+          <p:cNvPr id="51" name="Text 39"/>
+          <p:cNvSpPr txBox="1"/>
+          <p:nvPr/>
+        </p:nvSpPr>
+        <p:spPr>
+          <a:xfrm>
+            <a:off x="5449824" y="5349240"/>
+            <a:ext cx="1335024" cy="822960"/>
+          </a:xfrm>
+          <a:prstGeom prst="rect">
+            <a:avLst/>
+          </a:prstGeom>
+          <a:noFill/>
+          <a:ln/>
+        </p:spPr>
+        <p:txBody>
+          <a:bodyPr wrap="square" lIns="0" tIns="0" rIns="0" bIns="0" rtlCol="0" anchor="t"/>
+          <a:lstStyle/>
+          <a:p>
+            <a:pPr algn="ctr" indent="0" marL="0">
+              <a:lnSpc>
+                <a:spcPct val="105000"/>
+              </a:lnSpc>
+              <a:buNone/>
+            </a:pPr>
+            <a:r>
+              <a:rPr lang="en-US" sz="850" dirty="0">
+                <a:solidFill>
+                  <a:srgbClr val="5B6470"/>
+                </a:solidFill>
+                <a:latin typeface="Calibri" pitchFamily="34" charset="0"/>
+                <a:ea typeface="Calibri" pitchFamily="34" charset="-122"/>
+                <a:cs typeface="Calibri" pitchFamily="34" charset="-120"/>
+              </a:rPr>
+              <a:t>Sees screenshots and navigates with the mouse and keyboard</a:t>
+            </a:r>
+            <a:endParaRPr lang="en-US" sz="850" dirty="0"/>
+          </a:p>
+        </p:txBody>
+      </p:sp>
+      <p:sp>
+        <p:nvSpPr>
+          <p:cNvPr id="52" name="Shape 40"/>
+          <p:cNvSpPr/>
+          <p:nvPr/>
+        </p:nvSpPr>
+        <p:spPr>
+          <a:xfrm>
+            <a:off x="6885432" y="5143500"/>
+            <a:ext cx="164592" cy="182880"/>
+          </a:xfrm>
+          <a:prstGeom prst="rightArrow">
+            <a:avLst/>
+          </a:prstGeom>
+          <a:solidFill>
+            <a:srgbClr val="B9C2CF"/>
+          </a:solidFill>
+          <a:ln w="6350">
+            <a:solidFill>
+              <a:srgbClr val="B9C2CF"/>
+            </a:solidFill>
+            <a:prstDash val="solid"/>
+          </a:ln>
+        </p:spPr>
+      </p:sp>
+      <p:sp>
+        <p:nvSpPr>
+          <p:cNvPr id="53" name="Shape 41"/>
+          <p:cNvSpPr/>
+          <p:nvPr/>
+        </p:nvSpPr>
+        <p:spPr>
+          <a:xfrm>
+            <a:off x="7077456" y="4251960"/>
+            <a:ext cx="1481328" cy="1965960"/>
+          </a:xfrm>
+          <a:prstGeom prst="roundRect">
+            <a:avLst>
+              <a:gd name="adj" fmla="val 7407"/>
+            </a:avLst>
+          </a:prstGeom>
+          <a:solidFill>
+            <a:srgbClr val="F3F4F7"/>
+          </a:solidFill>
+          <a:ln w="9525">
+            <a:solidFill>
+              <a:srgbClr val="D5D9E0"/>
+            </a:solidFill>
+            <a:prstDash val="solid"/>
+          </a:ln>
+        </p:spPr>
+      </p:sp>
+      <p:pic>
+        <p:nvPicPr>
+          <p:cNvPr id="54" name="Image 10" descr="preencoded.png">    </p:cNvPr>
+          <p:cNvPicPr>
+            <a:picLocks noChangeAspect="1"/>
+          </p:cNvPicPr>
+          <p:nvPr/>
+        </p:nvPicPr>
+        <p:blipFill>
+          <a:blip r:embed="rId11"/>
+          <a:stretch>
+            <a:fillRect/>
+          </a:stretch>
+        </p:blipFill>
+        <p:spPr>
+          <a:xfrm>
+            <a:off x="7543800" y="4416552"/>
+            <a:ext cx="548640" cy="548640"/>
+          </a:xfrm>
+          <a:prstGeom prst="rect">
+            <a:avLst/>
+          </a:prstGeom>
+        </p:spPr>
+      </p:pic>
+      <p:sp>
+        <p:nvSpPr>
+          <p:cNvPr id="55" name="Text 42"/>
+          <p:cNvSpPr txBox="1"/>
+          <p:nvPr/>
+        </p:nvSpPr>
+        <p:spPr>
+          <a:xfrm>
+            <a:off x="7150608" y="5056632"/>
+            <a:ext cx="1335024" cy="292608"/>
+          </a:xfrm>
+          <a:prstGeom prst="rect">
+            <a:avLst/>
+          </a:prstGeom>
+          <a:noFill/>
+          <a:ln/>
+        </p:spPr>
+        <p:txBody>
+          <a:bodyPr wrap="square" lIns="0" tIns="0" rIns="0" bIns="0" rtlCol="0" anchor="t"/>
+          <a:lstStyle/>
+          <a:p>
+            <a:pPr algn="ctr" indent="0" marL="0">
+              <a:lnSpc>
+                <a:spcPct val="100000"/>
+              </a:lnSpc>
+              <a:buNone/>
+            </a:pPr>
+            <a:r>
+              <a:rPr lang="en-US" sz="1100" b="1" dirty="0">
+                <a:solidFill>
+                  <a:srgbClr val="1F2A44"/>
+                </a:solidFill>
+                <a:latin typeface="Calibri" pitchFamily="34" charset="0"/>
+                <a:ea typeface="Calibri" pitchFamily="34" charset="-122"/>
+                <a:cs typeface="Calibri" pitchFamily="34" charset="-120"/>
+              </a:rPr>
+              <a:t>Evidence</a:t>
+            </a:r>
+            <a:endParaRPr lang="en-US" sz="1100" dirty="0"/>
+          </a:p>
+        </p:txBody>
+      </p:sp>
+      <p:sp>
+        <p:nvSpPr>
+          <p:cNvPr id="56" name="Text 43"/>
+          <p:cNvSpPr txBox="1"/>
+          <p:nvPr/>
+        </p:nvSpPr>
+        <p:spPr>
+          <a:xfrm>
+            <a:off x="7150608" y="5349240"/>
+            <a:ext cx="1335024" cy="822960"/>
+          </a:xfrm>
+          <a:prstGeom prst="rect">
+            <a:avLst/>
+          </a:prstGeom>
+          <a:noFill/>
+          <a:ln/>
+        </p:spPr>
+        <p:txBody>
+          <a:bodyPr wrap="square" lIns="0" tIns="0" rIns="0" bIns="0" rtlCol="0" anchor="t"/>
+          <a:lstStyle/>
+          <a:p>
+            <a:pPr algn="ctr" indent="0" marL="0">
+              <a:lnSpc>
+                <a:spcPct val="105000"/>
+              </a:lnSpc>
+              <a:buNone/>
+            </a:pPr>
+            <a:r>
+              <a:rPr lang="en-US" sz="850" dirty="0">
+                <a:solidFill>
+                  <a:srgbClr val="5B6470"/>
+                </a:solidFill>
+                <a:latin typeface="Calibri" pitchFamily="34" charset="0"/>
+                <a:ea typeface="Calibri" pitchFamily="34" charset="-122"/>
+                <a:cs typeface="Calibri" pitchFamily="34" charset="-120"/>
+              </a:rPr>
+              <a:t>Everything is recorded. The final request is captured but not sent.</a:t>
+            </a:r>
+            <a:endParaRPr lang="en-US" sz="850" dirty="0"/>
+          </a:p>
+        </p:txBody>
+      </p:sp>
+      <p:sp>
+        <p:nvSpPr>
+          <p:cNvPr id="57" name="Shape 44"/>
+          <p:cNvSpPr/>
+          <p:nvPr/>
+        </p:nvSpPr>
+        <p:spPr>
+          <a:xfrm>
+            <a:off x="8586216" y="5143500"/>
+            <a:ext cx="164592" cy="182880"/>
+          </a:xfrm>
+          <a:prstGeom prst="rightArrow">
+            <a:avLst/>
+          </a:prstGeom>
+          <a:solidFill>
+            <a:srgbClr val="B9C2CF"/>
+          </a:solidFill>
+          <a:ln w="6350">
+            <a:solidFill>
+              <a:srgbClr val="B9C2CF"/>
+            </a:solidFill>
+            <a:prstDash val="solid"/>
+          </a:ln>
+        </p:spPr>
+      </p:sp>
+      <p:sp>
+        <p:nvSpPr>
+          <p:cNvPr id="58" name="Shape 45"/>
+          <p:cNvSpPr/>
+          <p:nvPr/>
+        </p:nvSpPr>
+        <p:spPr>
+          <a:xfrm>
+            <a:off x="8778240" y="4251960"/>
+            <a:ext cx="1481328" cy="1965960"/>
+          </a:xfrm>
+          <a:prstGeom prst="roundRect">
+            <a:avLst>
+              <a:gd name="adj" fmla="val 7407"/>
+            </a:avLst>
+          </a:prstGeom>
+          <a:solidFill>
+            <a:srgbClr val="F3F4F7"/>
+          </a:solidFill>
+          <a:ln w="9525">
+            <a:solidFill>
+              <a:srgbClr val="D5D9E0"/>
+            </a:solidFill>
+            <a:prstDash val="solid"/>
+          </a:ln>
+        </p:spPr>
+      </p:sp>
+      <p:pic>
+        <p:nvPicPr>
+          <p:cNvPr id="59" name="Image 11" descr="preencoded.png">    </p:cNvPr>
+          <p:cNvPicPr>
+            <a:picLocks noChangeAspect="1"/>
+          </p:cNvPicPr>
+          <p:nvPr/>
+        </p:nvPicPr>
+        <p:blipFill>
+          <a:blip r:embed="rId12"/>
+          <a:stretch>
+            <a:fillRect/>
+          </a:stretch>
+        </p:blipFill>
+        <p:spPr>
+          <a:xfrm>
+            <a:off x="9244584" y="4416552"/>
+            <a:ext cx="548640" cy="548640"/>
+          </a:xfrm>
+          <a:prstGeom prst="rect">
+            <a:avLst/>
+          </a:prstGeom>
+        </p:spPr>
+      </p:pic>
+      <p:sp>
+        <p:nvSpPr>
+          <p:cNvPr id="60" name="Text 46"/>
+          <p:cNvSpPr txBox="1"/>
+          <p:nvPr/>
+        </p:nvSpPr>
+        <p:spPr>
+          <a:xfrm>
+            <a:off x="8851392" y="5056632"/>
+            <a:ext cx="1335024" cy="292608"/>
+          </a:xfrm>
+          <a:prstGeom prst="rect">
+            <a:avLst/>
+          </a:prstGeom>
+          <a:noFill/>
+          <a:ln/>
+        </p:spPr>
+        <p:txBody>
+          <a:bodyPr wrap="square" lIns="0" tIns="0" rIns="0" bIns="0" rtlCol="0" anchor="t"/>
+          <a:lstStyle/>
+          <a:p>
+            <a:pPr algn="ctr" indent="0" marL="0">
+              <a:lnSpc>
+                <a:spcPct val="100000"/>
+              </a:lnSpc>
+              <a:buNone/>
+            </a:pPr>
+            <a:r>
+              <a:rPr lang="en-US" sz="1100" b="1" dirty="0">
+                <a:solidFill>
+                  <a:srgbClr val="1F2A44"/>
+                </a:solidFill>
+                <a:latin typeface="Calibri" pitchFamily="34" charset="0"/>
+                <a:ea typeface="Calibri" pitchFamily="34" charset="-122"/>
+                <a:cs typeface="Calibri" pitchFamily="34" charset="-120"/>
+              </a:rPr>
+              <a:t>Checker</a:t>
+            </a:r>
+            <a:endParaRPr lang="en-US" sz="1100" dirty="0"/>
+          </a:p>
+        </p:txBody>
+      </p:sp>
+      <p:sp>
+        <p:nvSpPr>
+          <p:cNvPr id="61" name="Text 47"/>
+          <p:cNvSpPr txBox="1"/>
+          <p:nvPr/>
+        </p:nvSpPr>
+        <p:spPr>
+          <a:xfrm>
+            <a:off x="8851392" y="5349240"/>
+            <a:ext cx="1335024" cy="822960"/>
+          </a:xfrm>
+          <a:prstGeom prst="rect">
+            <a:avLst/>
+          </a:prstGeom>
+          <a:noFill/>
+          <a:ln/>
+        </p:spPr>
+        <p:txBody>
+          <a:bodyPr wrap="square" lIns="0" tIns="0" rIns="0" bIns="0" rtlCol="0" anchor="t"/>
+          <a:lstStyle/>
+          <a:p>
+            <a:pPr algn="ctr" indent="0" marL="0">
+              <a:lnSpc>
+                <a:spcPct val="105000"/>
+              </a:lnSpc>
+              <a:buNone/>
+            </a:pPr>
+            <a:r>
+              <a:rPr lang="en-US" sz="850" dirty="0">
+                <a:solidFill>
+                  <a:srgbClr val="5B6470"/>
+                </a:solidFill>
+                <a:latin typeface="Calibri" pitchFamily="34" charset="0"/>
+                <a:ea typeface="Calibri" pitchFamily="34" charset="-122"/>
+                <a:cs typeface="Calibri" pitchFamily="34" charset="-120"/>
+              </a:rPr>
+              <a:t>Checks the recorded evidence. No LLM judge.</a:t>
+            </a:r>
+            <a:endParaRPr lang="en-US" sz="850" dirty="0"/>
+          </a:p>
+        </p:txBody>
+      </p:sp>
+      <p:sp>
+        <p:nvSpPr>
+          <p:cNvPr id="62" name="Shape 48"/>
+          <p:cNvSpPr/>
+          <p:nvPr/>
+        </p:nvSpPr>
+        <p:spPr>
+          <a:xfrm>
+            <a:off x="10287000" y="5143500"/>
+            <a:ext cx="164592" cy="182880"/>
+          </a:xfrm>
+          <a:prstGeom prst="rightArrow">
+            <a:avLst/>
+          </a:prstGeom>
+          <a:solidFill>
+            <a:srgbClr val="B9C2CF"/>
+          </a:solidFill>
+          <a:ln w="6350">
+            <a:solidFill>
+              <a:srgbClr val="B9C2CF"/>
+            </a:solidFill>
+            <a:prstDash val="solid"/>
+          </a:ln>
+        </p:spPr>
+      </p:sp>
+      <p:sp>
+        <p:nvSpPr>
+          <p:cNvPr id="63" name="Shape 49"/>
+          <p:cNvSpPr/>
+          <p:nvPr/>
+        </p:nvSpPr>
+        <p:spPr>
+          <a:xfrm>
+            <a:off x="10479024" y="4251960"/>
+            <a:ext cx="1481328" cy="1965960"/>
+          </a:xfrm>
+          <a:prstGeom prst="roundRect">
+            <a:avLst>
+              <a:gd name="adj" fmla="val 7407"/>
+            </a:avLst>
+          </a:prstGeom>
+          <a:solidFill>
+            <a:srgbClr val="F3F4F7"/>
+          </a:solidFill>
+          <a:ln w="9525">
+            <a:solidFill>
+              <a:srgbClr val="D5D9E0"/>
+            </a:solidFill>
+            <a:prstDash val="solid"/>
+          </a:ln>
+        </p:spPr>
+      </p:sp>
+      <p:pic>
+        <p:nvPicPr>
+          <p:cNvPr id="64" name="Image 12" descr="preencoded.png">    </p:cNvPr>
+          <p:cNvPicPr>
+            <a:picLocks noChangeAspect="1"/>
+          </p:cNvPicPr>
+          <p:nvPr/>
+        </p:nvPicPr>
+        <p:blipFill>
+          <a:blip r:embed="rId13"/>
+          <a:stretch>
+            <a:fillRect/>
+          </a:stretch>
+        </p:blipFill>
+        <p:spPr>
+          <a:xfrm>
+            <a:off x="10945368" y="4416552"/>
+            <a:ext cx="548640" cy="548640"/>
+          </a:xfrm>
+          <a:prstGeom prst="rect">
+            <a:avLst/>
+          </a:prstGeom>
+        </p:spPr>
+      </p:pic>
+      <p:sp>
+        <p:nvSpPr>
+          <p:cNvPr id="65" name="Text 50"/>
+          <p:cNvSpPr txBox="1"/>
+          <p:nvPr/>
+        </p:nvSpPr>
+        <p:spPr>
+          <a:xfrm>
+            <a:off x="10552176" y="5056632"/>
+            <a:ext cx="1335024" cy="292608"/>
+          </a:xfrm>
+          <a:prstGeom prst="rect">
+            <a:avLst/>
+          </a:prstGeom>
+          <a:noFill/>
+          <a:ln/>
+        </p:spPr>
+        <p:txBody>
+          <a:bodyPr wrap="square" lIns="0" tIns="0" rIns="0" bIns="0" rtlCol="0" anchor="t"/>
+          <a:lstStyle/>
+          <a:p>
+            <a:pPr algn="ctr" indent="0" marL="0">
+              <a:lnSpc>
+                <a:spcPct val="100000"/>
+              </a:lnSpc>
+              <a:buNone/>
+            </a:pPr>
+            <a:r>
+              <a:rPr lang="en-US" sz="1100" b="1" dirty="0">
+                <a:solidFill>
+                  <a:srgbClr val="1F2A44"/>
+                </a:solidFill>
+                <a:latin typeface="Calibri" pitchFamily="34" charset="0"/>
+                <a:ea typeface="Calibri" pitchFamily="34" charset="-122"/>
+                <a:cs typeface="Calibri" pitchFamily="34" charset="-120"/>
               </a:rPr>
               <a:t>Result</a:t>
             </a:r>
-            <a:endParaRPr lang="en-US" sz="1150" dirty="0"/>
-          </a:p>
-        </p:txBody>
-      </p:sp>
-      <p:sp>
-        <p:nvSpPr>
-          <p:cNvPr id="58" name="Text 50"/>
-          <p:cNvSpPr txBox="1"/>
-          <p:nvPr/>
-        </p:nvSpPr>
-        <p:spPr>
-          <a:xfrm>
-            <a:off x="10616184" y="4846320"/>
-            <a:ext cx="1298448" cy="868680"/>
+            <a:endParaRPr lang="en-US" sz="1100" dirty="0"/>
+          </a:p>
+        </p:txBody>
+      </p:sp>
+      <p:sp>
+        <p:nvSpPr>
+          <p:cNvPr id="66" name="Text 51"/>
+          <p:cNvSpPr txBox="1"/>
+          <p:nvPr/>
+        </p:nvSpPr>
+        <p:spPr>
+          <a:xfrm>
+            <a:off x="10552176" y="5349240"/>
+            <a:ext cx="1335024" cy="822960"/>
           </a:xfrm>
           <a:prstGeom prst="rect">
             <a:avLst/>
@@ -2906,17 +3222,17 @@
               <a:buNone/>
             </a:pPr>
             <a:r>
-              <a:rPr lang="en-US" sz="900" dirty="0">
-                <a:solidFill>
-                  <a:srgbClr val="444444"/>
-                </a:solidFill>
-                <a:latin typeface="Arial" pitchFamily="34" charset="0"/>
-                <a:ea typeface="Arial" pitchFamily="34" charset="-122"/>
-                <a:cs typeface="Arial" pitchFamily="34" charset="-120"/>
+              <a:rPr lang="en-US" sz="850" dirty="0">
+                <a:solidFill>
+                  <a:srgbClr val="5B6470"/>
+                </a:solidFill>
+                <a:latin typeface="Calibri" pitchFamily="34" charset="0"/>
+                <a:ea typeface="Calibri" pitchFamily="34" charset="-122"/>
+                <a:cs typeface="Calibri" pitchFamily="34" charset="-120"/>
               </a:rPr>
               <a:t>Pass or fail for each language</a:t>
             </a:r>
-            <a:endParaRPr lang="en-US" sz="900" dirty="0"/>
+            <a:endParaRPr lang="en-US" sz="850" dirty="0"/>
           </a:p>
         </p:txBody>
       </p:sp>
@@ -2960,18 +3276,20 @@
         </p:nvSpPr>
         <p:spPr>
           <a:xfrm>
-            <a:off x="320040" y="320040"/>
-            <a:ext cx="3749040" cy="6217920"/>
-          </a:xfrm>
-          <a:prstGeom prst="rect">
-            <a:avLst/>
+            <a:off x="274320" y="274320"/>
+            <a:ext cx="3703320" cy="6309360"/>
+          </a:xfrm>
+          <a:prstGeom prst="roundRect">
+            <a:avLst>
+              <a:gd name="adj" fmla="val 3704"/>
+            </a:avLst>
           </a:prstGeom>
           <a:solidFill>
-            <a:srgbClr val="FFFFFF"/>
+            <a:srgbClr val="EEF3FB"/>
           </a:solidFill>
-          <a:ln w="12700">
+          <a:ln w="9525">
             <a:solidFill>
-              <a:srgbClr val="777777"/>
+              <a:srgbClr val="EEF3FB"/>
             </a:solidFill>
             <a:prstDash val="solid"/>
           </a:ln>
@@ -2985,8 +3303,8 @@
         </p:nvSpPr>
         <p:spPr>
           <a:xfrm>
-            <a:off x="457200" y="429768"/>
-            <a:ext cx="3474720" cy="320040"/>
+            <a:off x="502920" y="457200"/>
+            <a:ext cx="3291840" cy="365760"/>
           </a:xfrm>
           <a:prstGeom prst="rect">
             <a:avLst/>
@@ -3005,23 +3323,161 @@
               <a:buNone/>
             </a:pPr>
             <a:r>
-              <a:rPr lang="en-US" sz="1300" b="1" dirty="0">
-                <a:solidFill>
-                  <a:srgbClr val="111111"/>
-                </a:solidFill>
-                <a:latin typeface="Arial" pitchFamily="34" charset="0"/>
-                <a:ea typeface="Arial" pitchFamily="34" charset="-122"/>
-                <a:cs typeface="Arial" pitchFamily="34" charset="-120"/>
+              <a:rPr lang="en-US" sz="1600" b="1" dirty="0">
+                <a:solidFill>
+                  <a:srgbClr val="2F6FB3"/>
+                </a:solidFill>
+                <a:latin typeface="Calibri" pitchFamily="34" charset="0"/>
+                <a:ea typeface="Calibri" pitchFamily="34" charset="-122"/>
+                <a:cs typeface="Calibri" pitchFamily="34" charset="-120"/>
               </a:rPr>
               <a:t>What the agent sees and does</a:t>
             </a:r>
-            <a:endParaRPr lang="en-US" sz="1300" dirty="0"/>
+            <a:endParaRPr lang="en-US" sz="1600" dirty="0"/>
+          </a:p>
+        </p:txBody>
+      </p:sp>
+      <p:sp>
+        <p:nvSpPr>
+          <p:cNvPr id="4" name="Shape 2"/>
+          <p:cNvSpPr/>
+          <p:nvPr/>
+        </p:nvSpPr>
+        <p:spPr>
+          <a:xfrm>
+            <a:off x="4251960" y="274320"/>
+            <a:ext cx="3703320" cy="6309360"/>
+          </a:xfrm>
+          <a:prstGeom prst="roundRect">
+            <a:avLst>
+              <a:gd name="adj" fmla="val 3704"/>
+            </a:avLst>
+          </a:prstGeom>
+          <a:solidFill>
+            <a:srgbClr val="EEF7F0"/>
+          </a:solidFill>
+          <a:ln w="9525">
+            <a:solidFill>
+              <a:srgbClr val="EEF7F0"/>
+            </a:solidFill>
+            <a:prstDash val="solid"/>
+          </a:ln>
+        </p:spPr>
+      </p:sp>
+      <p:sp>
+        <p:nvSpPr>
+          <p:cNvPr id="5" name="Text 3"/>
+          <p:cNvSpPr txBox="1"/>
+          <p:nvPr/>
+        </p:nvSpPr>
+        <p:spPr>
+          <a:xfrm>
+            <a:off x="4480560" y="457200"/>
+            <a:ext cx="3291840" cy="365760"/>
+          </a:xfrm>
+          <a:prstGeom prst="rect">
+            <a:avLst/>
+          </a:prstGeom>
+          <a:noFill/>
+          <a:ln/>
+        </p:spPr>
+        <p:txBody>
+          <a:bodyPr wrap="square" lIns="0" tIns="0" rIns="0" bIns="0" rtlCol="0" anchor="t"/>
+          <a:lstStyle/>
+          <a:p>
+            <a:pPr algn="l" indent="0" marL="0">
+              <a:lnSpc>
+                <a:spcPct val="100000"/>
+              </a:lnSpc>
+              <a:buNone/>
+            </a:pPr>
+            <a:r>
+              <a:rPr lang="en-US" sz="1600" b="1" dirty="0">
+                <a:solidFill>
+                  <a:srgbClr val="2C7A4B"/>
+                </a:solidFill>
+                <a:latin typeface="Calibri" pitchFamily="34" charset="0"/>
+                <a:ea typeface="Calibri" pitchFamily="34" charset="-122"/>
+                <a:cs typeface="Calibri" pitchFamily="34" charset="-120"/>
+              </a:rPr>
+              <a:t>The two machines</a:t>
+            </a:r>
+            <a:endParaRPr lang="en-US" sz="1600" dirty="0"/>
+          </a:p>
+        </p:txBody>
+      </p:sp>
+      <p:sp>
+        <p:nvSpPr>
+          <p:cNvPr id="6" name="Shape 4"/>
+          <p:cNvSpPr/>
+          <p:nvPr/>
+        </p:nvSpPr>
+        <p:spPr>
+          <a:xfrm>
+            <a:off x="8229600" y="274320"/>
+            <a:ext cx="3703320" cy="6309360"/>
+          </a:xfrm>
+          <a:prstGeom prst="roundRect">
+            <a:avLst>
+              <a:gd name="adj" fmla="val 3704"/>
+            </a:avLst>
+          </a:prstGeom>
+          <a:solidFill>
+            <a:srgbClr val="FFF6E5"/>
+          </a:solidFill>
+          <a:ln w="9525">
+            <a:solidFill>
+              <a:srgbClr val="FFF6E5"/>
+            </a:solidFill>
+            <a:prstDash val="solid"/>
+          </a:ln>
+        </p:spPr>
+      </p:sp>
+      <p:sp>
+        <p:nvSpPr>
+          <p:cNvPr id="7" name="Text 5"/>
+          <p:cNvSpPr txBox="1"/>
+          <p:nvPr/>
+        </p:nvSpPr>
+        <p:spPr>
+          <a:xfrm>
+            <a:off x="8458200" y="457200"/>
+            <a:ext cx="3291840" cy="365760"/>
+          </a:xfrm>
+          <a:prstGeom prst="rect">
+            <a:avLst/>
+          </a:prstGeom>
+          <a:noFill/>
+          <a:ln/>
+        </p:spPr>
+        <p:txBody>
+          <a:bodyPr wrap="square" lIns="0" tIns="0" rIns="0" bIns="0" rtlCol="0" anchor="t"/>
+          <a:lstStyle/>
+          <a:p>
+            <a:pPr algn="l" indent="0" marL="0">
+              <a:lnSpc>
+                <a:spcPct val="100000"/>
+              </a:lnSpc>
+              <a:buNone/>
+            </a:pPr>
+            <a:r>
+              <a:rPr lang="en-US" sz="1600" b="1" dirty="0">
+                <a:solidFill>
+                  <a:srgbClr val="9A6B00"/>
+                </a:solidFill>
+                <a:latin typeface="Calibri" pitchFamily="34" charset="0"/>
+                <a:ea typeface="Calibri" pitchFamily="34" charset="-122"/>
+                <a:cs typeface="Calibri" pitchFamily="34" charset="-120"/>
+              </a:rPr>
+              <a:t>How we grade</a:t>
+            </a:r>
+            <a:endParaRPr lang="en-US" sz="1600" dirty="0"/>
           </a:p>
         </p:txBody>
       </p:sp>
       <p:pic>
         <p:nvPicPr>
-          <p:cNvPr id="4" name="Image 0" descr="en1.jpg">    </p:cNvPr>
+          <p:cNvPr id="8" name="Image 0" descr="preencoded.png">    </p:cNvPr>
           <p:cNvPicPr>
             <a:picLocks noChangeAspect="1"/>
           </p:cNvPicPr>
@@ -3035,8 +3491,8 @@
         </p:blipFill>
         <p:spPr>
           <a:xfrm>
-            <a:off x="457200" y="868680"/>
-            <a:ext cx="3474720" cy="1938528"/>
+            <a:off x="548640" y="1051560"/>
+            <a:ext cx="384048" cy="384048"/>
           </a:xfrm>
           <a:prstGeom prst="rect">
             <a:avLst/>
@@ -3045,36 +3501,14 @@
       </p:pic>
       <p:sp>
         <p:nvSpPr>
-          <p:cNvPr id="5" name="Shape 2"/>
-          <p:cNvSpPr/>
-          <p:nvPr/>
-        </p:nvSpPr>
-        <p:spPr>
-          <a:xfrm>
-            <a:off x="457200" y="868680"/>
-            <a:ext cx="3474720" cy="1938528"/>
-          </a:xfrm>
-          <a:prstGeom prst="rect">
-            <a:avLst/>
-          </a:prstGeom>
-          <a:ln w="9525">
-            <a:solidFill>
-              <a:srgbClr val="777777"/>
-            </a:solidFill>
-            <a:prstDash val="solid"/>
-          </a:ln>
-        </p:spPr>
-      </p:sp>
-      <p:sp>
-        <p:nvSpPr>
-          <p:cNvPr id="6" name="Text 3"/>
-          <p:cNvSpPr txBox="1"/>
-          <p:nvPr/>
-        </p:nvSpPr>
-        <p:spPr>
-          <a:xfrm>
-            <a:off x="457200" y="2880360"/>
-            <a:ext cx="3474720" cy="548640"/>
+          <p:cNvPr id="9" name="Text 6"/>
+          <p:cNvSpPr txBox="1"/>
+          <p:nvPr/>
+        </p:nvSpPr>
+        <p:spPr>
+          <a:xfrm>
+            <a:off x="1097280" y="1005840"/>
+            <a:ext cx="2926080" cy="274320"/>
           </a:xfrm>
           <a:prstGeom prst="rect">
             <a:avLst/>
@@ -3088,6 +3522,48 @@
           <a:p>
             <a:pPr algn="l" indent="0" marL="0">
               <a:lnSpc>
+                <a:spcPct val="100000"/>
+              </a:lnSpc>
+              <a:buNone/>
+            </a:pPr>
+            <a:r>
+              <a:rPr lang="en-US" sz="1200" b="1" dirty="0">
+                <a:solidFill>
+                  <a:srgbClr val="1F2A44"/>
+                </a:solidFill>
+                <a:latin typeface="Calibri" pitchFamily="34" charset="0"/>
+                <a:ea typeface="Calibri" pitchFamily="34" charset="-122"/>
+                <a:cs typeface="Calibri" pitchFamily="34" charset="-120"/>
+              </a:rPr>
+              <a:t>One screenshot per step</a:t>
+            </a:r>
+            <a:endParaRPr lang="en-US" sz="1200" dirty="0"/>
+          </a:p>
+        </p:txBody>
+      </p:sp>
+      <p:sp>
+        <p:nvSpPr>
+          <p:cNvPr id="10" name="Text 7"/>
+          <p:cNvSpPr txBox="1"/>
+          <p:nvPr/>
+        </p:nvSpPr>
+        <p:spPr>
+          <a:xfrm>
+            <a:off x="1097280" y="1280160"/>
+            <a:ext cx="2926080" cy="640080"/>
+          </a:xfrm>
+          <a:prstGeom prst="rect">
+            <a:avLst/>
+          </a:prstGeom>
+          <a:noFill/>
+          <a:ln/>
+        </p:spPr>
+        <p:txBody>
+          <a:bodyPr wrap="square" lIns="0" tIns="0" rIns="0" bIns="0" rtlCol="0" anchor="t"/>
+          <a:lstStyle/>
+          <a:p>
+            <a:pPr algn="l" indent="0" marL="0">
+              <a:lnSpc>
                 <a:spcPct val="105000"/>
               </a:lnSpc>
               <a:buNone/>
@@ -3095,382 +3571,21 @@
             <a:r>
               <a:rPr lang="en-US" sz="950" dirty="0">
                 <a:solidFill>
-                  <a:srgbClr val="444444"/>
-                </a:solidFill>
-                <a:latin typeface="Arial" pitchFamily="34" charset="0"/>
-                <a:ea typeface="Arial" pitchFamily="34" charset="-122"/>
-                <a:cs typeface="Arial" pitchFamily="34" charset="-120"/>
-              </a:rPr>
-              <a:t>One screenshot per step (1360 × 768). Nothing else: no page source, no accessibility tree, no hints.</a:t>
+                  <a:srgbClr val="5B6470"/>
+                </a:solidFill>
+                <a:latin typeface="Calibri" pitchFamily="34" charset="0"/>
+                <a:ea typeface="Calibri" pitchFamily="34" charset="-122"/>
+                <a:cs typeface="Calibri" pitchFamily="34" charset="-120"/>
+              </a:rPr>
+              <a:t>1360 × 768. No page source, no accessibility tree, no hints.</a:t>
             </a:r>
             <a:endParaRPr lang="en-US" sz="950" dirty="0"/>
-          </a:p>
-        </p:txBody>
-      </p:sp>
-      <p:sp>
-        <p:nvSpPr>
-          <p:cNvPr id="7" name="Text 4"/>
-          <p:cNvSpPr txBox="1"/>
-          <p:nvPr/>
-        </p:nvSpPr>
-        <p:spPr>
-          <a:xfrm>
-            <a:off x="457200" y="3566160"/>
-            <a:ext cx="3474720" cy="228600"/>
-          </a:xfrm>
-          <a:prstGeom prst="rect">
-            <a:avLst/>
-          </a:prstGeom>
-          <a:noFill/>
-          <a:ln/>
-        </p:spPr>
-        <p:txBody>
-          <a:bodyPr wrap="square" lIns="0" tIns="0" rIns="0" bIns="0" rtlCol="0" anchor="t"/>
-          <a:lstStyle/>
-          <a:p>
-            <a:pPr algn="l" indent="0" marL="0">
-              <a:lnSpc>
-                <a:spcPct val="100000"/>
-              </a:lnSpc>
-              <a:buNone/>
-            </a:pPr>
-            <a:r>
-              <a:rPr lang="en-US" sz="1100" b="1" dirty="0">
-                <a:solidFill>
-                  <a:srgbClr val="111111"/>
-                </a:solidFill>
-                <a:latin typeface="Arial" pitchFamily="34" charset="0"/>
-                <a:ea typeface="Arial" pitchFamily="34" charset="-122"/>
-                <a:cs typeface="Arial" pitchFamily="34" charset="-120"/>
-              </a:rPr>
-              <a:t>Actions</a:t>
-            </a:r>
-            <a:endParaRPr lang="en-US" sz="1100" dirty="0"/>
-          </a:p>
-        </p:txBody>
-      </p:sp>
-      <p:sp>
-        <p:nvSpPr>
-          <p:cNvPr id="8" name="Text 5"/>
-          <p:cNvSpPr txBox="1"/>
-          <p:nvPr/>
-        </p:nvSpPr>
-        <p:spPr>
-          <a:xfrm>
-            <a:off x="457200" y="3794760"/>
-            <a:ext cx="3474720" cy="457200"/>
-          </a:xfrm>
-          <a:prstGeom prst="rect">
-            <a:avLst/>
-          </a:prstGeom>
-          <a:noFill/>
-          <a:ln/>
-        </p:spPr>
-        <p:txBody>
-          <a:bodyPr wrap="square" lIns="0" tIns="0" rIns="0" bIns="0" rtlCol="0" anchor="t"/>
-          <a:lstStyle/>
-          <a:p>
-            <a:pPr algn="l" indent="0" marL="0">
-              <a:lnSpc>
-                <a:spcPct val="105000"/>
-              </a:lnSpc>
-              <a:buNone/>
-            </a:pPr>
-            <a:r>
-              <a:rPr lang="en-US" sz="950" dirty="0">
-                <a:solidFill>
-                  <a:srgbClr val="444444"/>
-                </a:solidFill>
-                <a:latin typeface="Arial" pitchFamily="34" charset="0"/>
-                <a:ea typeface="Arial" pitchFamily="34" charset="-122"/>
-                <a:cs typeface="Arial" pitchFamily="34" charset="-120"/>
-              </a:rPr>
-              <a:t>click, double click, drag, scroll, type, press key, wait, done</a:t>
-            </a:r>
-            <a:endParaRPr lang="en-US" sz="950" dirty="0"/>
-          </a:p>
-        </p:txBody>
-      </p:sp>
-      <p:sp>
-        <p:nvSpPr>
-          <p:cNvPr id="9" name="Text 6"/>
-          <p:cNvSpPr txBox="1"/>
-          <p:nvPr/>
-        </p:nvSpPr>
-        <p:spPr>
-          <a:xfrm>
-            <a:off x="457200" y="4343400"/>
-            <a:ext cx="3474720" cy="228600"/>
-          </a:xfrm>
-          <a:prstGeom prst="rect">
-            <a:avLst/>
-          </a:prstGeom>
-          <a:noFill/>
-          <a:ln/>
-        </p:spPr>
-        <p:txBody>
-          <a:bodyPr wrap="square" lIns="0" tIns="0" rIns="0" bIns="0" rtlCol="0" anchor="t"/>
-          <a:lstStyle/>
-          <a:p>
-            <a:pPr algn="l" indent="0" marL="0">
-              <a:lnSpc>
-                <a:spcPct val="100000"/>
-              </a:lnSpc>
-              <a:buNone/>
-            </a:pPr>
-            <a:r>
-              <a:rPr lang="en-US" sz="1100" b="1" dirty="0">
-                <a:solidFill>
-                  <a:srgbClr val="111111"/>
-                </a:solidFill>
-                <a:latin typeface="Arial" pitchFamily="34" charset="0"/>
-                <a:ea typeface="Arial" pitchFamily="34" charset="-122"/>
-                <a:cs typeface="Arial" pitchFamily="34" charset="-120"/>
-              </a:rPr>
-              <a:t>Budget</a:t>
-            </a:r>
-            <a:endParaRPr lang="en-US" sz="1100" dirty="0"/>
-          </a:p>
-        </p:txBody>
-      </p:sp>
-      <p:sp>
-        <p:nvSpPr>
-          <p:cNvPr id="10" name="Text 7"/>
-          <p:cNvSpPr txBox="1"/>
-          <p:nvPr/>
-        </p:nvSpPr>
-        <p:spPr>
-          <a:xfrm>
-            <a:off x="457200" y="4572000"/>
-            <a:ext cx="3474720" cy="822960"/>
-          </a:xfrm>
-          <a:prstGeom prst="rect">
-            <a:avLst/>
-          </a:prstGeom>
-          <a:noFill/>
-          <a:ln/>
-        </p:spPr>
-        <p:txBody>
-          <a:bodyPr wrap="square" lIns="0" tIns="0" rIns="0" bIns="0" rtlCol="0" anchor="t"/>
-          <a:lstStyle/>
-          <a:p>
-            <a:pPr algn="l" indent="0" marL="0">
-              <a:lnSpc>
-                <a:spcPct val="105000"/>
-              </a:lnSpc>
-              <a:buNone/>
-            </a:pPr>
-            <a:r>
-              <a:rPr lang="en-US" sz="950" dirty="0">
-                <a:solidFill>
-                  <a:srgbClr val="444444"/>
-                </a:solidFill>
-                <a:latin typeface="Arial" pitchFamily="34" charset="0"/>
-                <a:ea typeface="Arial" pitchFamily="34" charset="-122"/>
-                <a:cs typeface="Arial" pitchFamily="34" charset="-120"/>
-              </a:rPr>
-              <a:t>Each task has a fixed step and time limit (for example 150 steps or 30 minutes). The same limit is used for both languages and for every model.</a:t>
-            </a:r>
-            <a:endParaRPr lang="en-US" sz="950" dirty="0"/>
-          </a:p>
-        </p:txBody>
-      </p:sp>
-      <p:sp>
-        <p:nvSpPr>
-          <p:cNvPr id="11" name="Text 8"/>
-          <p:cNvSpPr txBox="1"/>
-          <p:nvPr/>
-        </p:nvSpPr>
-        <p:spPr>
-          <a:xfrm>
-            <a:off x="457200" y="5440680"/>
-            <a:ext cx="3474720" cy="228600"/>
-          </a:xfrm>
-          <a:prstGeom prst="rect">
-            <a:avLst/>
-          </a:prstGeom>
-          <a:noFill/>
-          <a:ln/>
-        </p:spPr>
-        <p:txBody>
-          <a:bodyPr wrap="square" lIns="0" tIns="0" rIns="0" bIns="0" rtlCol="0" anchor="t"/>
-          <a:lstStyle/>
-          <a:p>
-            <a:pPr algn="l" indent="0" marL="0">
-              <a:lnSpc>
-                <a:spcPct val="100000"/>
-              </a:lnSpc>
-              <a:buNone/>
-            </a:pPr>
-            <a:r>
-              <a:rPr lang="en-US" sz="1100" b="1" dirty="0">
-                <a:solidFill>
-                  <a:srgbClr val="111111"/>
-                </a:solidFill>
-                <a:latin typeface="Arial" pitchFamily="34" charset="0"/>
-                <a:ea typeface="Arial" pitchFamily="34" charset="-122"/>
-                <a:cs typeface="Arial" pitchFamily="34" charset="-120"/>
-              </a:rPr>
-              <a:t>Instructions</a:t>
-            </a:r>
-            <a:endParaRPr lang="en-US" sz="1100" dirty="0"/>
-          </a:p>
-        </p:txBody>
-      </p:sp>
-      <p:sp>
-        <p:nvSpPr>
-          <p:cNvPr id="12" name="Text 9"/>
-          <p:cNvSpPr txBox="1"/>
-          <p:nvPr/>
-        </p:nvSpPr>
-        <p:spPr>
-          <a:xfrm>
-            <a:off x="457200" y="5669280"/>
-            <a:ext cx="3474720" cy="777240"/>
-          </a:xfrm>
-          <a:prstGeom prst="rect">
-            <a:avLst/>
-          </a:prstGeom>
-          <a:noFill/>
-          <a:ln/>
-        </p:spPr>
-        <p:txBody>
-          <a:bodyPr wrap="square" lIns="0" tIns="0" rIns="0" bIns="0" rtlCol="0" anchor="t"/>
-          <a:lstStyle/>
-          <a:p>
-            <a:pPr algn="l" indent="0" marL="0">
-              <a:lnSpc>
-                <a:spcPct val="105000"/>
-              </a:lnSpc>
-              <a:buNone/>
-            </a:pPr>
-            <a:r>
-              <a:rPr lang="en-US" sz="950" dirty="0">
-                <a:solidFill>
-                  <a:srgbClr val="444444"/>
-                </a:solidFill>
-                <a:latin typeface="Arial" pitchFamily="34" charset="0"/>
-                <a:ea typeface="Arial" pitchFamily="34" charset="-122"/>
-                <a:cs typeface="Arial" pitchFamily="34" charset="-120"/>
-              </a:rPr>
-              <a:t>Frozen. A test fails if any instruction changes, and numbers, IDs and quoted text are the same in every language.</a:t>
-            </a:r>
-            <a:endParaRPr lang="en-US" sz="950" dirty="0"/>
-          </a:p>
-        </p:txBody>
-      </p:sp>
-      <p:sp>
-        <p:nvSpPr>
-          <p:cNvPr id="13" name="Shape 10"/>
-          <p:cNvSpPr/>
-          <p:nvPr/>
-        </p:nvSpPr>
-        <p:spPr>
-          <a:xfrm>
-            <a:off x="4297680" y="320040"/>
-            <a:ext cx="3749040" cy="6217920"/>
-          </a:xfrm>
-          <a:prstGeom prst="rect">
-            <a:avLst/>
-          </a:prstGeom>
-          <a:solidFill>
-            <a:srgbClr val="FFFFFF"/>
-          </a:solidFill>
-          <a:ln w="12700">
-            <a:solidFill>
-              <a:srgbClr val="777777"/>
-            </a:solidFill>
-            <a:prstDash val="solid"/>
-          </a:ln>
-        </p:spPr>
-      </p:sp>
-      <p:sp>
-        <p:nvSpPr>
-          <p:cNvPr id="14" name="Text 11"/>
-          <p:cNvSpPr txBox="1"/>
-          <p:nvPr/>
-        </p:nvSpPr>
-        <p:spPr>
-          <a:xfrm>
-            <a:off x="4434840" y="429768"/>
-            <a:ext cx="3474720" cy="320040"/>
-          </a:xfrm>
-          <a:prstGeom prst="rect">
-            <a:avLst/>
-          </a:prstGeom>
-          <a:noFill/>
-          <a:ln/>
-        </p:spPr>
-        <p:txBody>
-          <a:bodyPr wrap="square" lIns="0" tIns="0" rIns="0" bIns="0" rtlCol="0" anchor="t"/>
-          <a:lstStyle/>
-          <a:p>
-            <a:pPr algn="l" indent="0" marL="0">
-              <a:lnSpc>
-                <a:spcPct val="100000"/>
-              </a:lnSpc>
-              <a:buNone/>
-            </a:pPr>
-            <a:r>
-              <a:rPr lang="en-US" sz="1300" b="1" dirty="0">
-                <a:solidFill>
-                  <a:srgbClr val="111111"/>
-                </a:solidFill>
-                <a:latin typeface="Arial" pitchFamily="34" charset="0"/>
-                <a:ea typeface="Arial" pitchFamily="34" charset="-122"/>
-                <a:cs typeface="Arial" pitchFamily="34" charset="-120"/>
-              </a:rPr>
-              <a:t>The two machines</a:t>
-            </a:r>
-            <a:endParaRPr lang="en-US" sz="1300" dirty="0"/>
-          </a:p>
-        </p:txBody>
-      </p:sp>
-      <p:sp>
-        <p:nvSpPr>
-          <p:cNvPr id="15" name="Text 12"/>
-          <p:cNvSpPr txBox="1"/>
-          <p:nvPr/>
-        </p:nvSpPr>
-        <p:spPr>
-          <a:xfrm>
-            <a:off x="4434840" y="868680"/>
-            <a:ext cx="3474720" cy="228600"/>
-          </a:xfrm>
-          <a:prstGeom prst="rect">
-            <a:avLst/>
-          </a:prstGeom>
-          <a:noFill/>
-          <a:ln/>
-        </p:spPr>
-        <p:txBody>
-          <a:bodyPr wrap="square" lIns="0" tIns="0" rIns="0" bIns="0" rtlCol="0" anchor="t"/>
-          <a:lstStyle/>
-          <a:p>
-            <a:pPr algn="l" indent="0" marL="0">
-              <a:lnSpc>
-                <a:spcPct val="100000"/>
-              </a:lnSpc>
-              <a:buNone/>
-            </a:pPr>
-            <a:r>
-              <a:rPr lang="en-US" sz="1050" b="1" dirty="0">
-                <a:solidFill>
-                  <a:srgbClr val="1F4E8C"/>
-                </a:solidFill>
-                <a:latin typeface="Arial" pitchFamily="34" charset="0"/>
-                <a:ea typeface="Arial" pitchFamily="34" charset="-122"/>
-                <a:cs typeface="Arial" pitchFamily="34" charset="-120"/>
-              </a:rPr>
-              <a:t>English VM</a:t>
-            </a:r>
-            <a:endParaRPr lang="en-US" sz="1050" dirty="0"/>
           </a:p>
         </p:txBody>
       </p:sp>
       <p:pic>
         <p:nvPicPr>
-          <p:cNvPr id="16" name="Image 1" descr="vm-en.jpg">    </p:cNvPr>
+          <p:cNvPr id="11" name="Image 1" descr="preencoded.png">    </p:cNvPr>
           <p:cNvPicPr>
             <a:picLocks noChangeAspect="1"/>
           </p:cNvPicPr>
@@ -3484,8 +3599,8 @@
         </p:blipFill>
         <p:spPr>
           <a:xfrm>
-            <a:off x="4434840" y="1097280"/>
-            <a:ext cx="3474720" cy="1965960"/>
+            <a:off x="548640" y="2057400"/>
+            <a:ext cx="384048" cy="384048"/>
           </a:xfrm>
           <a:prstGeom prst="rect">
             <a:avLst/>
@@ -3494,36 +3609,14 @@
       </p:pic>
       <p:sp>
         <p:nvSpPr>
-          <p:cNvPr id="17" name="Shape 13"/>
-          <p:cNvSpPr/>
-          <p:nvPr/>
-        </p:nvSpPr>
-        <p:spPr>
-          <a:xfrm>
-            <a:off x="4434840" y="1097280"/>
-            <a:ext cx="3474720" cy="1965960"/>
-          </a:xfrm>
-          <a:prstGeom prst="rect">
-            <a:avLst/>
-          </a:prstGeom>
-          <a:ln w="9525">
-            <a:solidFill>
-              <a:srgbClr val="777777"/>
-            </a:solidFill>
-            <a:prstDash val="solid"/>
-          </a:ln>
-        </p:spPr>
-      </p:sp>
-      <p:sp>
-        <p:nvSpPr>
-          <p:cNvPr id="18" name="Text 14"/>
-          <p:cNvSpPr txBox="1"/>
-          <p:nvPr/>
-        </p:nvSpPr>
-        <p:spPr>
-          <a:xfrm>
-            <a:off x="4434840" y="3200400"/>
-            <a:ext cx="3474720" cy="228600"/>
+          <p:cNvPr id="12" name="Text 8"/>
+          <p:cNvSpPr txBox="1"/>
+          <p:nvPr/>
+        </p:nvSpPr>
+        <p:spPr>
+          <a:xfrm>
+            <a:off x="1097280" y="2011680"/>
+            <a:ext cx="2926080" cy="274320"/>
           </a:xfrm>
           <a:prstGeom prst="rect">
             <a:avLst/>
@@ -3542,23 +3635,65 @@
               <a:buNone/>
             </a:pPr>
             <a:r>
-              <a:rPr lang="en-US" sz="1050" b="1" dirty="0">
-                <a:solidFill>
-                  <a:srgbClr val="1E6B3A"/>
-                </a:solidFill>
-                <a:latin typeface="Arial" pitchFamily="34" charset="0"/>
-                <a:ea typeface="Arial" pitchFamily="34" charset="-122"/>
-                <a:cs typeface="Arial" pitchFamily="34" charset="-120"/>
-              </a:rPr>
-              <a:t>Arabic VM</a:t>
-            </a:r>
-            <a:endParaRPr lang="en-US" sz="1050" dirty="0"/>
+              <a:rPr lang="en-US" sz="1200" b="1" dirty="0">
+                <a:solidFill>
+                  <a:srgbClr val="1F2A44"/>
+                </a:solidFill>
+                <a:latin typeface="Calibri" pitchFamily="34" charset="0"/>
+                <a:ea typeface="Calibri" pitchFamily="34" charset="-122"/>
+                <a:cs typeface="Calibri" pitchFamily="34" charset="-120"/>
+              </a:rPr>
+              <a:t>Mouse</a:t>
+            </a:r>
+            <a:endParaRPr lang="en-US" sz="1200" dirty="0"/>
+          </a:p>
+        </p:txBody>
+      </p:sp>
+      <p:sp>
+        <p:nvSpPr>
+          <p:cNvPr id="13" name="Text 9"/>
+          <p:cNvSpPr txBox="1"/>
+          <p:nvPr/>
+        </p:nvSpPr>
+        <p:spPr>
+          <a:xfrm>
+            <a:off x="1097280" y="2286000"/>
+            <a:ext cx="2926080" cy="640080"/>
+          </a:xfrm>
+          <a:prstGeom prst="rect">
+            <a:avLst/>
+          </a:prstGeom>
+          <a:noFill/>
+          <a:ln/>
+        </p:spPr>
+        <p:txBody>
+          <a:bodyPr wrap="square" lIns="0" tIns="0" rIns="0" bIns="0" rtlCol="0" anchor="t"/>
+          <a:lstStyle/>
+          <a:p>
+            <a:pPr algn="l" indent="0" marL="0">
+              <a:lnSpc>
+                <a:spcPct val="105000"/>
+              </a:lnSpc>
+              <a:buNone/>
+            </a:pPr>
+            <a:r>
+              <a:rPr lang="en-US" sz="950" dirty="0">
+                <a:solidFill>
+                  <a:srgbClr val="5B6470"/>
+                </a:solidFill>
+                <a:latin typeface="Calibri" pitchFamily="34" charset="0"/>
+                <a:ea typeface="Calibri" pitchFamily="34" charset="-122"/>
+                <a:cs typeface="Calibri" pitchFamily="34" charset="-120"/>
+              </a:rPr>
+              <a:t>click, double click, drag, scroll</a:t>
+            </a:r>
+            <a:endParaRPr lang="en-US" sz="950" dirty="0"/>
           </a:p>
         </p:txBody>
       </p:sp>
       <p:pic>
         <p:nvPicPr>
-          <p:cNvPr id="19" name="Image 2" descr="vm-msa.jpg">    </p:cNvPr>
+          <p:cNvPr id="14" name="Image 2" descr="preencoded.png">    </p:cNvPr>
           <p:cNvPicPr>
             <a:picLocks noChangeAspect="1"/>
           </p:cNvPicPr>
@@ -3572,8 +3707,8 @@
         </p:blipFill>
         <p:spPr>
           <a:xfrm>
-            <a:off x="4434840" y="3429000"/>
-            <a:ext cx="3474720" cy="1965960"/>
+            <a:off x="548640" y="3063240"/>
+            <a:ext cx="384048" cy="384048"/>
           </a:xfrm>
           <a:prstGeom prst="rect">
             <a:avLst/>
@@ -3582,21 +3717,218 @@
       </p:pic>
       <p:sp>
         <p:nvSpPr>
-          <p:cNvPr id="20" name="Shape 15"/>
+          <p:cNvPr id="15" name="Text 10"/>
+          <p:cNvSpPr txBox="1"/>
+          <p:nvPr/>
+        </p:nvSpPr>
+        <p:spPr>
+          <a:xfrm>
+            <a:off x="1097280" y="3017520"/>
+            <a:ext cx="2926080" cy="274320"/>
+          </a:xfrm>
+          <a:prstGeom prst="rect">
+            <a:avLst/>
+          </a:prstGeom>
+          <a:noFill/>
+          <a:ln/>
+        </p:spPr>
+        <p:txBody>
+          <a:bodyPr wrap="square" lIns="0" tIns="0" rIns="0" bIns="0" rtlCol="0" anchor="t"/>
+          <a:lstStyle/>
+          <a:p>
+            <a:pPr algn="l" indent="0" marL="0">
+              <a:lnSpc>
+                <a:spcPct val="100000"/>
+              </a:lnSpc>
+              <a:buNone/>
+            </a:pPr>
+            <a:r>
+              <a:rPr lang="en-US" sz="1200" b="1" dirty="0">
+                <a:solidFill>
+                  <a:srgbClr val="1F2A44"/>
+                </a:solidFill>
+                <a:latin typeface="Calibri" pitchFamily="34" charset="0"/>
+                <a:ea typeface="Calibri" pitchFamily="34" charset="-122"/>
+                <a:cs typeface="Calibri" pitchFamily="34" charset="-120"/>
+              </a:rPr>
+              <a:t>Keyboard</a:t>
+            </a:r>
+            <a:endParaRPr lang="en-US" sz="1200" dirty="0"/>
+          </a:p>
+        </p:txBody>
+      </p:sp>
+      <p:sp>
+        <p:nvSpPr>
+          <p:cNvPr id="16" name="Text 11"/>
+          <p:cNvSpPr txBox="1"/>
+          <p:nvPr/>
+        </p:nvSpPr>
+        <p:spPr>
+          <a:xfrm>
+            <a:off x="1097280" y="3291840"/>
+            <a:ext cx="2926080" cy="640080"/>
+          </a:xfrm>
+          <a:prstGeom prst="rect">
+            <a:avLst/>
+          </a:prstGeom>
+          <a:noFill/>
+          <a:ln/>
+        </p:spPr>
+        <p:txBody>
+          <a:bodyPr wrap="square" lIns="0" tIns="0" rIns="0" bIns="0" rtlCol="0" anchor="t"/>
+          <a:lstStyle/>
+          <a:p>
+            <a:pPr algn="l" indent="0" marL="0">
+              <a:lnSpc>
+                <a:spcPct val="105000"/>
+              </a:lnSpc>
+              <a:buNone/>
+            </a:pPr>
+            <a:r>
+              <a:rPr lang="en-US" sz="950" dirty="0">
+                <a:solidFill>
+                  <a:srgbClr val="5B6470"/>
+                </a:solidFill>
+                <a:latin typeface="Calibri" pitchFamily="34" charset="0"/>
+                <a:ea typeface="Calibri" pitchFamily="34" charset="-122"/>
+                <a:cs typeface="Calibri" pitchFamily="34" charset="-120"/>
+              </a:rPr>
+              <a:t>type, press key</a:t>
+            </a:r>
+            <a:endParaRPr lang="en-US" sz="950" dirty="0"/>
+          </a:p>
+        </p:txBody>
+      </p:sp>
+      <p:pic>
+        <p:nvPicPr>
+          <p:cNvPr id="17" name="Image 3" descr="preencoded.png">    </p:cNvPr>
+          <p:cNvPicPr>
+            <a:picLocks noChangeAspect="1"/>
+          </p:cNvPicPr>
+          <p:nvPr/>
+        </p:nvPicPr>
+        <p:blipFill>
+          <a:blip r:embed="rId4"/>
+          <a:stretch>
+            <a:fillRect/>
+          </a:stretch>
+        </p:blipFill>
+        <p:spPr>
+          <a:xfrm>
+            <a:off x="548640" y="4069080"/>
+            <a:ext cx="384048" cy="384048"/>
+          </a:xfrm>
+          <a:prstGeom prst="rect">
+            <a:avLst/>
+          </a:prstGeom>
+        </p:spPr>
+      </p:pic>
+      <p:sp>
+        <p:nvSpPr>
+          <p:cNvPr id="18" name="Text 12"/>
+          <p:cNvSpPr txBox="1"/>
+          <p:nvPr/>
+        </p:nvSpPr>
+        <p:spPr>
+          <a:xfrm>
+            <a:off x="1097280" y="4023360"/>
+            <a:ext cx="2926080" cy="274320"/>
+          </a:xfrm>
+          <a:prstGeom prst="rect">
+            <a:avLst/>
+          </a:prstGeom>
+          <a:noFill/>
+          <a:ln/>
+        </p:spPr>
+        <p:txBody>
+          <a:bodyPr wrap="square" lIns="0" tIns="0" rIns="0" bIns="0" rtlCol="0" anchor="t"/>
+          <a:lstStyle/>
+          <a:p>
+            <a:pPr algn="l" indent="0" marL="0">
+              <a:lnSpc>
+                <a:spcPct val="100000"/>
+              </a:lnSpc>
+              <a:buNone/>
+            </a:pPr>
+            <a:r>
+              <a:rPr lang="en-US" sz="1200" b="1" dirty="0">
+                <a:solidFill>
+                  <a:srgbClr val="1F2A44"/>
+                </a:solidFill>
+                <a:latin typeface="Calibri" pitchFamily="34" charset="0"/>
+                <a:ea typeface="Calibri" pitchFamily="34" charset="-122"/>
+                <a:cs typeface="Calibri" pitchFamily="34" charset="-120"/>
+              </a:rPr>
+              <a:t>Control</a:t>
+            </a:r>
+            <a:endParaRPr lang="en-US" sz="1200" dirty="0"/>
+          </a:p>
+        </p:txBody>
+      </p:sp>
+      <p:sp>
+        <p:nvSpPr>
+          <p:cNvPr id="19" name="Text 13"/>
+          <p:cNvSpPr txBox="1"/>
+          <p:nvPr/>
+        </p:nvSpPr>
+        <p:spPr>
+          <a:xfrm>
+            <a:off x="1097280" y="4297680"/>
+            <a:ext cx="2926080" cy="640080"/>
+          </a:xfrm>
+          <a:prstGeom prst="rect">
+            <a:avLst/>
+          </a:prstGeom>
+          <a:noFill/>
+          <a:ln/>
+        </p:spPr>
+        <p:txBody>
+          <a:bodyPr wrap="square" lIns="0" tIns="0" rIns="0" bIns="0" rtlCol="0" anchor="t"/>
+          <a:lstStyle/>
+          <a:p>
+            <a:pPr algn="l" indent="0" marL="0">
+              <a:lnSpc>
+                <a:spcPct val="105000"/>
+              </a:lnSpc>
+              <a:buNone/>
+            </a:pPr>
+            <a:r>
+              <a:rPr lang="en-US" sz="950" dirty="0">
+                <a:solidFill>
+                  <a:srgbClr val="5B6470"/>
+                </a:solidFill>
+                <a:latin typeface="Calibri" pitchFamily="34" charset="0"/>
+                <a:ea typeface="Calibri" pitchFamily="34" charset="-122"/>
+                <a:cs typeface="Calibri" pitchFamily="34" charset="-120"/>
+              </a:rPr>
+              <a:t>wait, done</a:t>
+            </a:r>
+            <a:endParaRPr lang="en-US" sz="950" dirty="0"/>
+          </a:p>
+        </p:txBody>
+      </p:sp>
+      <p:sp>
+        <p:nvSpPr>
+          <p:cNvPr id="20" name="Shape 14"/>
           <p:cNvSpPr/>
           <p:nvPr/>
         </p:nvSpPr>
         <p:spPr>
           <a:xfrm>
-            <a:off x="4434840" y="3429000"/>
-            <a:ext cx="3474720" cy="1965960"/>
-          </a:xfrm>
-          <a:prstGeom prst="rect">
-            <a:avLst/>
-          </a:prstGeom>
+            <a:off x="502920" y="5074920"/>
+            <a:ext cx="3246120" cy="1280160"/>
+          </a:xfrm>
+          <a:prstGeom prst="roundRect">
+            <a:avLst>
+              <a:gd name="adj" fmla="val 7143"/>
+            </a:avLst>
+          </a:prstGeom>
+          <a:solidFill>
+            <a:srgbClr val="FFFFFF"/>
+          </a:solidFill>
           <a:ln w="9525">
             <a:solidFill>
-              <a:srgbClr val="777777"/>
+              <a:srgbClr val="D5D9E0"/>
             </a:solidFill>
             <a:prstDash val="solid"/>
           </a:ln>
@@ -3604,14 +3936,14 @@
       </p:sp>
       <p:sp>
         <p:nvSpPr>
-          <p:cNvPr id="21" name="Text 16"/>
-          <p:cNvSpPr txBox="1"/>
-          <p:nvPr/>
-        </p:nvSpPr>
-        <p:spPr>
-          <a:xfrm>
-            <a:off x="4434840" y="5486400"/>
-            <a:ext cx="3474720" cy="1005840"/>
+          <p:cNvPr id="21" name="Text 15"/>
+          <p:cNvSpPr txBox="1"/>
+          <p:nvPr/>
+        </p:nvSpPr>
+        <p:spPr>
+          <a:xfrm>
+            <a:off x="685800" y="5193792"/>
+            <a:ext cx="2926080" cy="274320"/>
           </a:xfrm>
           <a:prstGeom prst="rect">
             <a:avLst/>
@@ -3625,6 +3957,48 @@
           <a:p>
             <a:pPr algn="l" indent="0" marL="0">
               <a:lnSpc>
+                <a:spcPct val="100000"/>
+              </a:lnSpc>
+              <a:buNone/>
+            </a:pPr>
+            <a:r>
+              <a:rPr lang="en-US" sz="1100" b="1" dirty="0">
+                <a:solidFill>
+                  <a:srgbClr val="1F2A44"/>
+                </a:solidFill>
+                <a:latin typeface="Calibri" pitchFamily="34" charset="0"/>
+                <a:ea typeface="Calibri" pitchFamily="34" charset="-122"/>
+                <a:cs typeface="Calibri" pitchFamily="34" charset="-120"/>
+              </a:rPr>
+              <a:t>Budget</a:t>
+            </a:r>
+            <a:endParaRPr lang="en-US" sz="1100" dirty="0"/>
+          </a:p>
+        </p:txBody>
+      </p:sp>
+      <p:sp>
+        <p:nvSpPr>
+          <p:cNvPr id="22" name="Text 16"/>
+          <p:cNvSpPr txBox="1"/>
+          <p:nvPr/>
+        </p:nvSpPr>
+        <p:spPr>
+          <a:xfrm>
+            <a:off x="685800" y="5468112"/>
+            <a:ext cx="2926080" cy="868680"/>
+          </a:xfrm>
+          <a:prstGeom prst="rect">
+            <a:avLst/>
+          </a:prstGeom>
+          <a:noFill/>
+          <a:ln/>
+        </p:spPr>
+        <p:txBody>
+          <a:bodyPr wrap="square" lIns="0" tIns="0" rIns="0" bIns="0" rtlCol="0" anchor="t"/>
+          <a:lstStyle/>
+          <a:p>
+            <a:pPr algn="l" indent="0" marL="0">
+              <a:lnSpc>
                 <a:spcPct val="105000"/>
               </a:lnSpc>
               <a:buNone/>
@@ -3632,13 +4006,13 @@
             <a:r>
               <a:rPr lang="en-US" sz="950" dirty="0">
                 <a:solidFill>
-                  <a:srgbClr val="444444"/>
-                </a:solidFill>
-                <a:latin typeface="Arial" pitchFamily="34" charset="0"/>
-                <a:ea typeface="Arial" pitchFamily="34" charset="-122"/>
-                <a:cs typeface="Arial" pitchFamily="34" charset="-120"/>
-              </a:rPr>
-              <a:t>Both machines start from the same image and the same files. The only difference is the system language: the Arabic machine has an Arabic interface, keyboard and folder names, laid out right to left.</a:t>
+                  <a:srgbClr val="5B6470"/>
+                </a:solidFill>
+                <a:latin typeface="Calibri" pitchFamily="34" charset="0"/>
+                <a:ea typeface="Calibri" pitchFamily="34" charset="-122"/>
+                <a:cs typeface="Calibri" pitchFamily="34" charset="-120"/>
+              </a:rPr>
+              <a:t>Each task has a fixed step and time limit (for example 150 steps or 30 minutes). The same limit is used for both languages and every model.</a:t>
             </a:r>
             <a:endParaRPr lang="en-US" sz="950" dirty="0"/>
           </a:p>
@@ -3646,24 +4020,26 @@
       </p:sp>
       <p:sp>
         <p:nvSpPr>
-          <p:cNvPr id="22" name="Shape 17"/>
+          <p:cNvPr id="23" name="Shape 17"/>
           <p:cNvSpPr/>
           <p:nvPr/>
         </p:nvSpPr>
         <p:spPr>
           <a:xfrm>
-            <a:off x="8275320" y="320040"/>
-            <a:ext cx="3611880" cy="6217920"/>
-          </a:xfrm>
-          <a:prstGeom prst="rect">
-            <a:avLst/>
+            <a:off x="4526280" y="1005840"/>
+            <a:ext cx="1508760" cy="1417320"/>
+          </a:xfrm>
+          <a:prstGeom prst="roundRect">
+            <a:avLst>
+              <a:gd name="adj" fmla="val 6452"/>
+            </a:avLst>
           </a:prstGeom>
           <a:solidFill>
             <a:srgbClr val="FFFFFF"/>
           </a:solidFill>
-          <a:ln w="12700">
+          <a:ln w="9525">
             <a:solidFill>
-              <a:srgbClr val="777777"/>
+              <a:srgbClr val="D5D9E0"/>
             </a:solidFill>
             <a:prstDash val="solid"/>
           </a:ln>
@@ -3671,14 +4047,347 @@
       </p:sp>
       <p:sp>
         <p:nvSpPr>
-          <p:cNvPr id="23" name="Text 18"/>
-          <p:cNvSpPr txBox="1"/>
-          <p:nvPr/>
-        </p:nvSpPr>
-        <p:spPr>
-          <a:xfrm>
-            <a:off x="8412480" y="429768"/>
-            <a:ext cx="3337560" cy="320040"/>
+          <p:cNvPr id="24" name="Shape 18"/>
+          <p:cNvSpPr/>
+          <p:nvPr/>
+        </p:nvSpPr>
+        <p:spPr>
+          <a:xfrm>
+            <a:off x="6172200" y="1005840"/>
+            <a:ext cx="1508760" cy="1417320"/>
+          </a:xfrm>
+          <a:prstGeom prst="roundRect">
+            <a:avLst>
+              <a:gd name="adj" fmla="val 6452"/>
+            </a:avLst>
+          </a:prstGeom>
+          <a:solidFill>
+            <a:srgbClr val="FFFFFF"/>
+          </a:solidFill>
+          <a:ln w="9525">
+            <a:solidFill>
+              <a:srgbClr val="D5D9E0"/>
+            </a:solidFill>
+            <a:prstDash val="solid"/>
+          </a:ln>
+        </p:spPr>
+      </p:sp>
+      <p:pic>
+        <p:nvPicPr>
+          <p:cNvPr id="25" name="Image 4" descr="preencoded.png">    </p:cNvPr>
+          <p:cNvPicPr>
+            <a:picLocks noChangeAspect="1"/>
+          </p:cNvPicPr>
+          <p:nvPr/>
+        </p:nvPicPr>
+        <p:blipFill>
+          <a:blip r:embed="rId5"/>
+          <a:stretch>
+            <a:fillRect/>
+          </a:stretch>
+        </p:blipFill>
+        <p:spPr>
+          <a:xfrm>
+            <a:off x="5029200" y="1115568"/>
+            <a:ext cx="502920" cy="502920"/>
+          </a:xfrm>
+          <a:prstGeom prst="rect">
+            <a:avLst/>
+          </a:prstGeom>
+        </p:spPr>
+      </p:pic>
+      <p:pic>
+        <p:nvPicPr>
+          <p:cNvPr id="26" name="Image 5" descr="preencoded.png">    </p:cNvPr>
+          <p:cNvPicPr>
+            <a:picLocks noChangeAspect="1"/>
+          </p:cNvPicPr>
+          <p:nvPr/>
+        </p:nvPicPr>
+        <p:blipFill>
+          <a:blip r:embed="rId6"/>
+          <a:stretch>
+            <a:fillRect/>
+          </a:stretch>
+        </p:blipFill>
+        <p:spPr>
+          <a:xfrm>
+            <a:off x="6675120" y="1115568"/>
+            <a:ext cx="502920" cy="502920"/>
+          </a:xfrm>
+          <a:prstGeom prst="rect">
+            <a:avLst/>
+          </a:prstGeom>
+        </p:spPr>
+      </p:pic>
+      <p:sp>
+        <p:nvSpPr>
+          <p:cNvPr id="27" name="Text 19"/>
+          <p:cNvSpPr txBox="1"/>
+          <p:nvPr/>
+        </p:nvSpPr>
+        <p:spPr>
+          <a:xfrm>
+            <a:off x="4572000" y="1691640"/>
+            <a:ext cx="1417320" cy="274320"/>
+          </a:xfrm>
+          <a:prstGeom prst="rect">
+            <a:avLst/>
+          </a:prstGeom>
+          <a:noFill/>
+          <a:ln/>
+        </p:spPr>
+        <p:txBody>
+          <a:bodyPr wrap="square" lIns="0" tIns="0" rIns="0" bIns="0" rtlCol="0" anchor="t"/>
+          <a:lstStyle/>
+          <a:p>
+            <a:pPr algn="ctr" indent="0" marL="0">
+              <a:lnSpc>
+                <a:spcPct val="100000"/>
+              </a:lnSpc>
+              <a:buNone/>
+            </a:pPr>
+            <a:r>
+              <a:rPr lang="en-US" sz="1100" b="1" dirty="0">
+                <a:solidFill>
+                  <a:srgbClr val="2F6FB3"/>
+                </a:solidFill>
+                <a:latin typeface="Calibri" pitchFamily="34" charset="0"/>
+                <a:ea typeface="Calibri" pitchFamily="34" charset="-122"/>
+                <a:cs typeface="Calibri" pitchFamily="34" charset="-120"/>
+              </a:rPr>
+              <a:t>English VM</a:t>
+            </a:r>
+            <a:endParaRPr lang="en-US" sz="1100" dirty="0"/>
+          </a:p>
+        </p:txBody>
+      </p:sp>
+      <p:sp>
+        <p:nvSpPr>
+          <p:cNvPr id="28" name="Text 20"/>
+          <p:cNvSpPr txBox="1"/>
+          <p:nvPr/>
+        </p:nvSpPr>
+        <p:spPr>
+          <a:xfrm>
+            <a:off x="6217920" y="1691640"/>
+            <a:ext cx="1417320" cy="274320"/>
+          </a:xfrm>
+          <a:prstGeom prst="rect">
+            <a:avLst/>
+          </a:prstGeom>
+          <a:noFill/>
+          <a:ln/>
+        </p:spPr>
+        <p:txBody>
+          <a:bodyPr wrap="square" lIns="0" tIns="0" rIns="0" bIns="0" rtlCol="0" anchor="t"/>
+          <a:lstStyle/>
+          <a:p>
+            <a:pPr algn="ctr" indent="0" marL="0">
+              <a:lnSpc>
+                <a:spcPct val="100000"/>
+              </a:lnSpc>
+              <a:buNone/>
+            </a:pPr>
+            <a:r>
+              <a:rPr lang="en-US" sz="1100" b="1" dirty="0">
+                <a:solidFill>
+                  <a:srgbClr val="2C7A4B"/>
+                </a:solidFill>
+                <a:latin typeface="Calibri" pitchFamily="34" charset="0"/>
+                <a:ea typeface="Calibri" pitchFamily="34" charset="-122"/>
+                <a:cs typeface="Calibri" pitchFamily="34" charset="-120"/>
+              </a:rPr>
+              <a:t>Arabic VM</a:t>
+            </a:r>
+            <a:endParaRPr lang="en-US" sz="1100" dirty="0"/>
+          </a:p>
+        </p:txBody>
+      </p:sp>
+      <p:sp>
+        <p:nvSpPr>
+          <p:cNvPr id="29" name="Text 21"/>
+          <p:cNvSpPr txBox="1"/>
+          <p:nvPr/>
+        </p:nvSpPr>
+        <p:spPr>
+          <a:xfrm>
+            <a:off x="4572000" y="1965960"/>
+            <a:ext cx="1417320" cy="365760"/>
+          </a:xfrm>
+          <a:prstGeom prst="rect">
+            <a:avLst/>
+          </a:prstGeom>
+          <a:noFill/>
+          <a:ln/>
+        </p:spPr>
+        <p:txBody>
+          <a:bodyPr wrap="square" lIns="0" tIns="0" rIns="0" bIns="0" rtlCol="0" anchor="t"/>
+          <a:lstStyle/>
+          <a:p>
+            <a:pPr algn="ctr" indent="0" marL="0">
+              <a:lnSpc>
+                <a:spcPct val="100000"/>
+              </a:lnSpc>
+              <a:buNone/>
+            </a:pPr>
+            <a:r>
+              <a:rPr lang="en-US" sz="850" dirty="0">
+                <a:solidFill>
+                  <a:srgbClr val="5B6470"/>
+                </a:solidFill>
+                <a:latin typeface="Calibri" pitchFamily="34" charset="0"/>
+                <a:ea typeface="Calibri" pitchFamily="34" charset="-122"/>
+                <a:cs typeface="Calibri" pitchFamily="34" charset="-120"/>
+              </a:rPr>
+              <a:t>English interface</a:t>
+            </a:r>
+            <a:endParaRPr lang="en-US" sz="850" dirty="0"/>
+          </a:p>
+        </p:txBody>
+      </p:sp>
+      <p:sp>
+        <p:nvSpPr>
+          <p:cNvPr id="30" name="Text 22"/>
+          <p:cNvSpPr txBox="1"/>
+          <p:nvPr/>
+        </p:nvSpPr>
+        <p:spPr>
+          <a:xfrm>
+            <a:off x="6217920" y="1965960"/>
+            <a:ext cx="1417320" cy="457200"/>
+          </a:xfrm>
+          <a:prstGeom prst="rect">
+            <a:avLst/>
+          </a:prstGeom>
+          <a:noFill/>
+          <a:ln/>
+        </p:spPr>
+        <p:txBody>
+          <a:bodyPr wrap="square" lIns="0" tIns="0" rIns="0" bIns="0" rtlCol="0" anchor="t"/>
+          <a:lstStyle/>
+          <a:p>
+            <a:pPr algn="ctr" indent="0" marL="0">
+              <a:lnSpc>
+                <a:spcPct val="100000"/>
+              </a:lnSpc>
+              <a:buNone/>
+            </a:pPr>
+            <a:r>
+              <a:rPr lang="en-US" sz="850" dirty="0">
+                <a:solidFill>
+                  <a:srgbClr val="5B6470"/>
+                </a:solidFill>
+                <a:latin typeface="Calibri" pitchFamily="34" charset="0"/>
+                <a:ea typeface="Calibri" pitchFamily="34" charset="-122"/>
+                <a:cs typeface="Calibri" pitchFamily="34" charset="-120"/>
+              </a:rPr>
+              <a:t>Arabic interface, keyboard and folder names, right to left</a:t>
+            </a:r>
+            <a:endParaRPr lang="en-US" sz="850" dirty="0"/>
+          </a:p>
+        </p:txBody>
+      </p:sp>
+      <p:pic>
+        <p:nvPicPr>
+          <p:cNvPr id="31" name="Image 6" descr="preencoded.png">    </p:cNvPr>
+          <p:cNvPicPr>
+            <a:picLocks noChangeAspect="1"/>
+          </p:cNvPicPr>
+          <p:nvPr/>
+        </p:nvPicPr>
+        <p:blipFill>
+          <a:blip r:embed="rId7"/>
+          <a:stretch>
+            <a:fillRect/>
+          </a:stretch>
+        </p:blipFill>
+        <p:spPr>
+          <a:xfrm>
+            <a:off x="5943600" y="1554480"/>
+            <a:ext cx="320040" cy="320040"/>
+          </a:xfrm>
+          <a:prstGeom prst="rect">
+            <a:avLst/>
+          </a:prstGeom>
+        </p:spPr>
+      </p:pic>
+      <p:sp>
+        <p:nvSpPr>
+          <p:cNvPr id="32" name="Text 23"/>
+          <p:cNvSpPr txBox="1"/>
+          <p:nvPr/>
+        </p:nvSpPr>
+        <p:spPr>
+          <a:xfrm>
+            <a:off x="4526280" y="2560320"/>
+            <a:ext cx="3154680" cy="457200"/>
+          </a:xfrm>
+          <a:prstGeom prst="rect">
+            <a:avLst/>
+          </a:prstGeom>
+          <a:noFill/>
+          <a:ln/>
+        </p:spPr>
+        <p:txBody>
+          <a:bodyPr wrap="square" lIns="0" tIns="0" rIns="0" bIns="0" rtlCol="0" anchor="t"/>
+          <a:lstStyle/>
+          <a:p>
+            <a:pPr algn="ctr" indent="0" marL="0">
+              <a:lnSpc>
+                <a:spcPct val="100000"/>
+              </a:lnSpc>
+              <a:buNone/>
+            </a:pPr>
+            <a:r>
+              <a:rPr lang="en-US" sz="950" i="1" dirty="0">
+                <a:solidFill>
+                  <a:srgbClr val="5B6470"/>
+                </a:solidFill>
+                <a:latin typeface="Calibri" pitchFamily="34" charset="0"/>
+                <a:ea typeface="Calibri" pitchFamily="34" charset="-122"/>
+                <a:cs typeface="Calibri" pitchFamily="34" charset="-120"/>
+              </a:rPr>
+              <a:t>Both machines start from the same image and the same files. Only the system language differs.</a:t>
+            </a:r>
+            <a:endParaRPr lang="en-US" sz="950" dirty="0"/>
+          </a:p>
+        </p:txBody>
+      </p:sp>
+      <p:pic>
+        <p:nvPicPr>
+          <p:cNvPr id="33" name="Image 7" descr="preencoded.png">    </p:cNvPr>
+          <p:cNvPicPr>
+            <a:picLocks noChangeAspect="1"/>
+          </p:cNvPicPr>
+          <p:nvPr/>
+        </p:nvPicPr>
+        <p:blipFill>
+          <a:blip r:embed="rId8"/>
+          <a:stretch>
+            <a:fillRect/>
+          </a:stretch>
+        </p:blipFill>
+        <p:spPr>
+          <a:xfrm>
+            <a:off x="4526280" y="3246120"/>
+            <a:ext cx="384048" cy="384048"/>
+          </a:xfrm>
+          <a:prstGeom prst="rect">
+            <a:avLst/>
+          </a:prstGeom>
+        </p:spPr>
+      </p:pic>
+      <p:sp>
+        <p:nvSpPr>
+          <p:cNvPr id="34" name="Text 24"/>
+          <p:cNvSpPr txBox="1"/>
+          <p:nvPr/>
+        </p:nvSpPr>
+        <p:spPr>
+          <a:xfrm>
+            <a:off x="5074920" y="3200400"/>
+            <a:ext cx="2926080" cy="274320"/>
           </a:xfrm>
           <a:prstGeom prst="rect">
             <a:avLst/>
@@ -3697,30 +4406,30 @@
               <a:buNone/>
             </a:pPr>
             <a:r>
-              <a:rPr lang="en-US" sz="1300" b="1" dirty="0">
-                <a:solidFill>
-                  <a:srgbClr val="111111"/>
-                </a:solidFill>
-                <a:latin typeface="Arial" pitchFamily="34" charset="0"/>
-                <a:ea typeface="Arial" pitchFamily="34" charset="-122"/>
-                <a:cs typeface="Arial" pitchFamily="34" charset="-120"/>
-              </a:rPr>
-              <a:t>How we grade</a:t>
-            </a:r>
-            <a:endParaRPr lang="en-US" sz="1300" dirty="0"/>
-          </a:p>
-        </p:txBody>
-      </p:sp>
-      <p:sp>
-        <p:nvSpPr>
-          <p:cNvPr id="24" name="Text 19"/>
-          <p:cNvSpPr txBox="1"/>
-          <p:nvPr/>
-        </p:nvSpPr>
-        <p:spPr>
-          <a:xfrm>
-            <a:off x="8412480" y="868680"/>
-            <a:ext cx="3337560" cy="228600"/>
+              <a:rPr lang="en-US" sz="1200" b="1" dirty="0">
+                <a:solidFill>
+                  <a:srgbClr val="1F2A44"/>
+                </a:solidFill>
+                <a:latin typeface="Calibri" pitchFamily="34" charset="0"/>
+                <a:ea typeface="Calibri" pitchFamily="34" charset="-122"/>
+                <a:cs typeface="Calibri" pitchFamily="34" charset="-120"/>
+              </a:rPr>
+              <a:t>Recording</a:t>
+            </a:r>
+            <a:endParaRPr lang="en-US" sz="1200" dirty="0"/>
+          </a:p>
+        </p:txBody>
+      </p:sp>
+      <p:sp>
+        <p:nvSpPr>
+          <p:cNvPr id="35" name="Text 25"/>
+          <p:cNvSpPr txBox="1"/>
+          <p:nvPr/>
+        </p:nvSpPr>
+        <p:spPr>
+          <a:xfrm>
+            <a:off x="5074920" y="3474720"/>
+            <a:ext cx="2926080" cy="822960"/>
           </a:xfrm>
           <a:prstGeom prst="rect">
             <a:avLst/>
@@ -3734,35 +4443,101 @@
           <a:p>
             <a:pPr algn="l" indent="0" marL="0">
               <a:lnSpc>
+                <a:spcPct val="105000"/>
+              </a:lnSpc>
+              <a:buNone/>
+            </a:pPr>
+            <a:r>
+              <a:rPr lang="en-US" sz="950" dirty="0">
+                <a:solidFill>
+                  <a:srgbClr val="5B6470"/>
+                </a:solidFill>
+                <a:latin typeface="Calibri" pitchFamily="34" charset="0"/>
+                <a:ea typeface="Calibri" pitchFamily="34" charset="-122"/>
+                <a:cs typeface="Calibri" pitchFamily="34" charset="-120"/>
+              </a:rPr>
+              <a:t>Every screenshot, every action and every network request is saved for each run.</a:t>
+            </a:r>
+            <a:endParaRPr lang="en-US" sz="950" dirty="0"/>
+          </a:p>
+        </p:txBody>
+      </p:sp>
+      <p:pic>
+        <p:nvPicPr>
+          <p:cNvPr id="36" name="Image 8" descr="preencoded.png">    </p:cNvPr>
+          <p:cNvPicPr>
+            <a:picLocks noChangeAspect="1"/>
+          </p:cNvPicPr>
+          <p:nvPr/>
+        </p:nvPicPr>
+        <p:blipFill>
+          <a:blip r:embed="rId9"/>
+          <a:stretch>
+            <a:fillRect/>
+          </a:stretch>
+        </p:blipFill>
+        <p:spPr>
+          <a:xfrm>
+            <a:off x="4526280" y="4389120"/>
+            <a:ext cx="384048" cy="384048"/>
+          </a:xfrm>
+          <a:prstGeom prst="rect">
+            <a:avLst/>
+          </a:prstGeom>
+        </p:spPr>
+      </p:pic>
+      <p:sp>
+        <p:nvSpPr>
+          <p:cNvPr id="37" name="Text 26"/>
+          <p:cNvSpPr txBox="1"/>
+          <p:nvPr/>
+        </p:nvSpPr>
+        <p:spPr>
+          <a:xfrm>
+            <a:off x="5074920" y="4343400"/>
+            <a:ext cx="2926080" cy="274320"/>
+          </a:xfrm>
+          <a:prstGeom prst="rect">
+            <a:avLst/>
+          </a:prstGeom>
+          <a:noFill/>
+          <a:ln/>
+        </p:spPr>
+        <p:txBody>
+          <a:bodyPr wrap="square" lIns="0" tIns="0" rIns="0" bIns="0" rtlCol="0" anchor="t"/>
+          <a:lstStyle/>
+          <a:p>
+            <a:pPr algn="l" indent="0" marL="0">
+              <a:lnSpc>
                 <a:spcPct val="100000"/>
               </a:lnSpc>
               <a:buNone/>
             </a:pPr>
             <a:r>
-              <a:rPr lang="en-US" sz="1100" b="1" dirty="0">
-                <a:solidFill>
-                  <a:srgbClr val="111111"/>
-                </a:solidFill>
-                <a:latin typeface="Arial" pitchFamily="34" charset="0"/>
-                <a:ea typeface="Arial" pitchFamily="34" charset="-122"/>
-                <a:cs typeface="Arial" pitchFamily="34" charset="-120"/>
-              </a:rPr>
-              <a:t>Recording</a:t>
-            </a:r>
-            <a:endParaRPr lang="en-US" sz="1100" dirty="0"/>
-          </a:p>
-        </p:txBody>
-      </p:sp>
-      <p:sp>
-        <p:nvSpPr>
-          <p:cNvPr id="25" name="Text 20"/>
-          <p:cNvSpPr txBox="1"/>
-          <p:nvPr/>
-        </p:nvSpPr>
-        <p:spPr>
-          <a:xfrm>
-            <a:off x="8412480" y="1097280"/>
-            <a:ext cx="3337560" cy="548640"/>
+              <a:rPr lang="en-US" sz="1200" b="1" dirty="0">
+                <a:solidFill>
+                  <a:srgbClr val="1F2A44"/>
+                </a:solidFill>
+                <a:latin typeface="Calibri" pitchFamily="34" charset="0"/>
+                <a:ea typeface="Calibri" pitchFamily="34" charset="-122"/>
+                <a:cs typeface="Calibri" pitchFamily="34" charset="-120"/>
+              </a:rPr>
+              <a:t>Real websites, no side effects</a:t>
+            </a:r>
+            <a:endParaRPr lang="en-US" sz="1200" dirty="0"/>
+          </a:p>
+        </p:txBody>
+      </p:sp>
+      <p:sp>
+        <p:nvSpPr>
+          <p:cNvPr id="38" name="Text 27"/>
+          <p:cNvSpPr txBox="1"/>
+          <p:nvPr/>
+        </p:nvSpPr>
+        <p:spPr>
+          <a:xfrm>
+            <a:off x="5074920" y="4617720"/>
+            <a:ext cx="2926080" cy="822960"/>
           </a:xfrm>
           <a:prstGeom prst="rect">
             <a:avLst/>
@@ -3783,28 +4558,52 @@
             <a:r>
               <a:rPr lang="en-US" sz="950" dirty="0">
                 <a:solidFill>
-                  <a:srgbClr val="444444"/>
-                </a:solidFill>
-                <a:latin typeface="Arial" pitchFamily="34" charset="0"/>
-                <a:ea typeface="Arial" pitchFamily="34" charset="-122"/>
-                <a:cs typeface="Arial" pitchFamily="34" charset="-120"/>
-              </a:rPr>
-              <a:t>Every screenshot, every action and every network request is saved for each run.</a:t>
+                  <a:srgbClr val="5B6470"/>
+                </a:solidFill>
+                <a:latin typeface="Calibri" pitchFamily="34" charset="0"/>
+                <a:ea typeface="Calibri" pitchFamily="34" charset="-122"/>
+                <a:cs typeface="Calibri" pitchFamily="34" charset="-120"/>
+              </a:rPr>
+              <a:t>For payments, applications and posts, a proxy captures the final request and does not send it. The captured request is the evidence.</a:t>
             </a:r>
             <a:endParaRPr lang="en-US" sz="950" dirty="0"/>
           </a:p>
         </p:txBody>
       </p:sp>
-      <p:sp>
-        <p:nvSpPr>
-          <p:cNvPr id="26" name="Text 21"/>
-          <p:cNvSpPr txBox="1"/>
-          <p:nvPr/>
-        </p:nvSpPr>
-        <p:spPr>
-          <a:xfrm>
-            <a:off x="8412480" y="1737360"/>
-            <a:ext cx="3337560" cy="228600"/>
+      <p:pic>
+        <p:nvPicPr>
+          <p:cNvPr id="39" name="Image 9" descr="preencoded.png">    </p:cNvPr>
+          <p:cNvPicPr>
+            <a:picLocks noChangeAspect="1"/>
+          </p:cNvPicPr>
+          <p:nvPr/>
+        </p:nvPicPr>
+        <p:blipFill>
+          <a:blip r:embed="rId10"/>
+          <a:stretch>
+            <a:fillRect/>
+          </a:stretch>
+        </p:blipFill>
+        <p:spPr>
+          <a:xfrm>
+            <a:off x="4526280" y="5623560"/>
+            <a:ext cx="384048" cy="384048"/>
+          </a:xfrm>
+          <a:prstGeom prst="rect">
+            <a:avLst/>
+          </a:prstGeom>
+        </p:spPr>
+      </p:pic>
+      <p:sp>
+        <p:nvSpPr>
+          <p:cNvPr id="40" name="Text 28"/>
+          <p:cNvSpPr txBox="1"/>
+          <p:nvPr/>
+        </p:nvSpPr>
+        <p:spPr>
+          <a:xfrm>
+            <a:off x="5074920" y="5577840"/>
+            <a:ext cx="2926080" cy="274320"/>
           </a:xfrm>
           <a:prstGeom prst="rect">
             <a:avLst/>
@@ -3823,30 +4622,30 @@
               <a:buNone/>
             </a:pPr>
             <a:r>
-              <a:rPr lang="en-US" sz="1100" b="1" dirty="0">
-                <a:solidFill>
-                  <a:srgbClr val="111111"/>
-                </a:solidFill>
-                <a:latin typeface="Arial" pitchFamily="34" charset="0"/>
-                <a:ea typeface="Arial" pitchFamily="34" charset="-122"/>
-                <a:cs typeface="Arial" pitchFamily="34" charset="-120"/>
-              </a:rPr>
-              <a:t>Real websites, no side effects</a:t>
-            </a:r>
-            <a:endParaRPr lang="en-US" sz="1100" dirty="0"/>
-          </a:p>
-        </p:txBody>
-      </p:sp>
-      <p:sp>
-        <p:nvSpPr>
-          <p:cNvPr id="27" name="Text 22"/>
-          <p:cNvSpPr txBox="1"/>
-          <p:nvPr/>
-        </p:nvSpPr>
-        <p:spPr>
-          <a:xfrm>
-            <a:off x="8412480" y="1965960"/>
-            <a:ext cx="3337560" cy="777240"/>
+              <a:rPr lang="en-US" sz="1200" b="1" dirty="0">
+                <a:solidFill>
+                  <a:srgbClr val="1F2A44"/>
+                </a:solidFill>
+                <a:latin typeface="Calibri" pitchFamily="34" charset="0"/>
+                <a:ea typeface="Calibri" pitchFamily="34" charset="-122"/>
+                <a:cs typeface="Calibri" pitchFamily="34" charset="-120"/>
+              </a:rPr>
+              <a:t>Frozen instructions</a:t>
+            </a:r>
+            <a:endParaRPr lang="en-US" sz="1200" dirty="0"/>
+          </a:p>
+        </p:txBody>
+      </p:sp>
+      <p:sp>
+        <p:nvSpPr>
+          <p:cNvPr id="41" name="Text 29"/>
+          <p:cNvSpPr txBox="1"/>
+          <p:nvPr/>
+        </p:nvSpPr>
+        <p:spPr>
+          <a:xfrm>
+            <a:off x="5074920" y="5852160"/>
+            <a:ext cx="2926080" cy="822960"/>
           </a:xfrm>
           <a:prstGeom prst="rect">
             <a:avLst/>
@@ -3867,28 +4666,52 @@
             <a:r>
               <a:rPr lang="en-US" sz="950" dirty="0">
                 <a:solidFill>
-                  <a:srgbClr val="444444"/>
-                </a:solidFill>
-                <a:latin typeface="Arial" pitchFamily="34" charset="0"/>
-                <a:ea typeface="Arial" pitchFamily="34" charset="-122"/>
-                <a:cs typeface="Arial" pitchFamily="34" charset="-120"/>
-              </a:rPr>
-              <a:t>For payments, applications and posts, a proxy captures the final request and does not send it. The captured request is the evidence.</a:t>
+                  <a:srgbClr val="5B6470"/>
+                </a:solidFill>
+                <a:latin typeface="Calibri" pitchFamily="34" charset="0"/>
+                <a:ea typeface="Calibri" pitchFamily="34" charset="-122"/>
+                <a:cs typeface="Calibri" pitchFamily="34" charset="-120"/>
+              </a:rPr>
+              <a:t>A test fails if any instruction changes. Numbers, IDs and quoted text are the same in every language.</a:t>
             </a:r>
             <a:endParaRPr lang="en-US" sz="950" dirty="0"/>
           </a:p>
         </p:txBody>
       </p:sp>
-      <p:sp>
-        <p:nvSpPr>
-          <p:cNvPr id="28" name="Text 23"/>
-          <p:cNvSpPr txBox="1"/>
-          <p:nvPr/>
-        </p:nvSpPr>
-        <p:spPr>
-          <a:xfrm>
-            <a:off x="8412480" y="2834640"/>
-            <a:ext cx="3337560" cy="228600"/>
+      <p:pic>
+        <p:nvPicPr>
+          <p:cNvPr id="42" name="Image 10" descr="preencoded.png">    </p:cNvPr>
+          <p:cNvPicPr>
+            <a:picLocks noChangeAspect="1"/>
+          </p:cNvPicPr>
+          <p:nvPr/>
+        </p:nvPicPr>
+        <p:blipFill>
+          <a:blip r:embed="rId11"/>
+          <a:stretch>
+            <a:fillRect/>
+          </a:stretch>
+        </p:blipFill>
+        <p:spPr>
+          <a:xfrm>
+            <a:off x="8503920" y="1051560"/>
+            <a:ext cx="384048" cy="384048"/>
+          </a:xfrm>
+          <a:prstGeom prst="rect">
+            <a:avLst/>
+          </a:prstGeom>
+        </p:spPr>
+      </p:pic>
+      <p:sp>
+        <p:nvSpPr>
+          <p:cNvPr id="43" name="Text 30"/>
+          <p:cNvSpPr txBox="1"/>
+          <p:nvPr/>
+        </p:nvSpPr>
+        <p:spPr>
+          <a:xfrm>
+            <a:off x="9052560" y="1005840"/>
+            <a:ext cx="2926080" cy="274320"/>
           </a:xfrm>
           <a:prstGeom prst="rect">
             <a:avLst/>
@@ -3907,30 +4730,30 @@
               <a:buNone/>
             </a:pPr>
             <a:r>
-              <a:rPr lang="en-US" sz="1100" b="1" dirty="0">
-                <a:solidFill>
-                  <a:srgbClr val="111111"/>
-                </a:solidFill>
-                <a:latin typeface="Arial" pitchFamily="34" charset="0"/>
-                <a:ea typeface="Arial" pitchFamily="34" charset="-122"/>
-                <a:cs typeface="Arial" pitchFamily="34" charset="-120"/>
+              <a:rPr lang="en-US" sz="1200" b="1" dirty="0">
+                <a:solidFill>
+                  <a:srgbClr val="1F2A44"/>
+                </a:solidFill>
+                <a:latin typeface="Calibri" pitchFamily="34" charset="0"/>
+                <a:ea typeface="Calibri" pitchFamily="34" charset="-122"/>
+                <a:cs typeface="Calibri" pitchFamily="34" charset="-120"/>
               </a:rPr>
               <a:t>Checker</a:t>
             </a:r>
-            <a:endParaRPr lang="en-US" sz="1100" dirty="0"/>
-          </a:p>
-        </p:txBody>
-      </p:sp>
-      <p:sp>
-        <p:nvSpPr>
-          <p:cNvPr id="29" name="Text 24"/>
-          <p:cNvSpPr txBox="1"/>
-          <p:nvPr/>
-        </p:nvSpPr>
-        <p:spPr>
-          <a:xfrm>
-            <a:off x="8412480" y="3063240"/>
-            <a:ext cx="3337560" cy="822960"/>
+            <a:endParaRPr lang="en-US" sz="1200" dirty="0"/>
+          </a:p>
+        </p:txBody>
+      </p:sp>
+      <p:sp>
+        <p:nvSpPr>
+          <p:cNvPr id="44" name="Text 31"/>
+          <p:cNvSpPr txBox="1"/>
+          <p:nvPr/>
+        </p:nvSpPr>
+        <p:spPr>
+          <a:xfrm>
+            <a:off x="9052560" y="1280160"/>
+            <a:ext cx="2788920" cy="914400"/>
           </a:xfrm>
           <a:prstGeom prst="rect">
             <a:avLst/>
@@ -3951,13 +4774,13 @@
             <a:r>
               <a:rPr lang="en-US" sz="950" dirty="0">
                 <a:solidFill>
-                  <a:srgbClr val="444444"/>
-                </a:solidFill>
-                <a:latin typeface="Arial" pitchFamily="34" charset="0"/>
-                <a:ea typeface="Arial" pitchFamily="34" charset="-122"/>
-                <a:cs typeface="Arial" pitchFamily="34" charset="-120"/>
-              </a:rPr>
-              <a:t>One per task. It looks at the saved files, the application state or the captured request and returns one of three results. No LLM judge.</a:t>
+                  <a:srgbClr val="5B6470"/>
+                </a:solidFill>
+                <a:latin typeface="Calibri" pitchFamily="34" charset="0"/>
+                <a:ea typeface="Calibri" pitchFamily="34" charset="-122"/>
+                <a:cs typeface="Calibri" pitchFamily="34" charset="-120"/>
+              </a:rPr>
+              <a:t>One per task. It looks at the saved files, the application state or the captured request. No LLM judge.</a:t>
             </a:r>
             <a:endParaRPr lang="en-US" sz="950" dirty="0"/>
           </a:p>
@@ -3965,24 +4788,24 @@
       </p:sp>
       <p:sp>
         <p:nvSpPr>
-          <p:cNvPr id="30" name="Text 25"/>
-          <p:cNvSpPr txBox="1"/>
-          <p:nvPr/>
-        </p:nvSpPr>
-        <p:spPr>
-          <a:xfrm>
-            <a:off x="8412480" y="3977640"/>
-            <a:ext cx="1005840" cy="292608"/>
-          </a:xfrm>
-          <a:prstGeom prst="rect">
-            <a:avLst/>
-          </a:prstGeom>
-          <a:noFill/>
-          <a:ln w="12700">
-            <a:solidFill>
-              <a:srgbClr val="1E7B3B"/>
-            </a:solidFill>
-          </a:ln>
+          <p:cNvPr id="45" name="Text 32"/>
+          <p:cNvSpPr txBox="1"/>
+          <p:nvPr/>
+        </p:nvSpPr>
+        <p:spPr>
+          <a:xfrm>
+            <a:off x="8503920" y="2423160"/>
+            <a:ext cx="1005840" cy="347472"/>
+          </a:xfrm>
+          <a:prstGeom prst="roundRect">
+            <a:avLst>
+              <a:gd name="adj" fmla="val 21053"/>
+            </a:avLst>
+          </a:prstGeom>
+          <a:solidFill>
+            <a:srgbClr val="2E8B57"/>
+          </a:solidFill>
+          <a:ln/>
         </p:spPr>
         <p:txBody>
           <a:bodyPr wrap="square" lIns="0" tIns="0" rIns="0" bIns="0" rtlCol="0" anchor="ctr"/>
@@ -3995,40 +4818,40 @@
               <a:buNone/>
             </a:pPr>
             <a:r>
-              <a:rPr lang="en-US" sz="1100" b="1" dirty="0">
-                <a:solidFill>
-                  <a:srgbClr val="1E7B3B"/>
-                </a:solidFill>
-                <a:latin typeface="Arial" pitchFamily="34" charset="0"/>
-                <a:ea typeface="Arial" pitchFamily="34" charset="-122"/>
-                <a:cs typeface="Arial" pitchFamily="34" charset="-120"/>
+              <a:rPr lang="en-US" sz="1050" b="1" dirty="0">
+                <a:solidFill>
+                  <a:srgbClr val="FFFFFF"/>
+                </a:solidFill>
+                <a:latin typeface="Calibri" pitchFamily="34" charset="0"/>
+                <a:ea typeface="Calibri" pitchFamily="34" charset="-122"/>
+                <a:cs typeface="Calibri" pitchFamily="34" charset="-120"/>
               </a:rPr>
               <a:t>PASS</a:t>
             </a:r>
-            <a:endParaRPr lang="en-US" sz="1100" dirty="0"/>
-          </a:p>
-        </p:txBody>
-      </p:sp>
-      <p:sp>
-        <p:nvSpPr>
-          <p:cNvPr id="31" name="Text 26"/>
-          <p:cNvSpPr txBox="1"/>
-          <p:nvPr/>
-        </p:nvSpPr>
-        <p:spPr>
-          <a:xfrm>
-            <a:off x="9555480" y="3977640"/>
-            <a:ext cx="1005840" cy="292608"/>
-          </a:xfrm>
-          <a:prstGeom prst="rect">
-            <a:avLst/>
-          </a:prstGeom>
-          <a:noFill/>
-          <a:ln w="12700">
-            <a:solidFill>
-              <a:srgbClr val="B22222"/>
-            </a:solidFill>
-          </a:ln>
+            <a:endParaRPr lang="en-US" sz="1050" dirty="0"/>
+          </a:p>
+        </p:txBody>
+      </p:sp>
+      <p:sp>
+        <p:nvSpPr>
+          <p:cNvPr id="46" name="Text 33"/>
+          <p:cNvSpPr txBox="1"/>
+          <p:nvPr/>
+        </p:nvSpPr>
+        <p:spPr>
+          <a:xfrm>
+            <a:off x="9601200" y="2423160"/>
+            <a:ext cx="1005840" cy="347472"/>
+          </a:xfrm>
+          <a:prstGeom prst="roundRect">
+            <a:avLst>
+              <a:gd name="adj" fmla="val 21053"/>
+            </a:avLst>
+          </a:prstGeom>
+          <a:solidFill>
+            <a:srgbClr val="B03A2E"/>
+          </a:solidFill>
+          <a:ln/>
         </p:spPr>
         <p:txBody>
           <a:bodyPr wrap="square" lIns="0" tIns="0" rIns="0" bIns="0" rtlCol="0" anchor="ctr"/>
@@ -4041,40 +4864,40 @@
               <a:buNone/>
             </a:pPr>
             <a:r>
-              <a:rPr lang="en-US" sz="1100" b="1" dirty="0">
-                <a:solidFill>
-                  <a:srgbClr val="B22222"/>
-                </a:solidFill>
-                <a:latin typeface="Arial" pitchFamily="34" charset="0"/>
-                <a:ea typeface="Arial" pitchFamily="34" charset="-122"/>
-                <a:cs typeface="Arial" pitchFamily="34" charset="-120"/>
+              <a:rPr lang="en-US" sz="1050" b="1" dirty="0">
+                <a:solidFill>
+                  <a:srgbClr val="FFFFFF"/>
+                </a:solidFill>
+                <a:latin typeface="Calibri" pitchFamily="34" charset="0"/>
+                <a:ea typeface="Calibri" pitchFamily="34" charset="-122"/>
+                <a:cs typeface="Calibri" pitchFamily="34" charset="-120"/>
               </a:rPr>
               <a:t>FAIL</a:t>
             </a:r>
-            <a:endParaRPr lang="en-US" sz="1100" dirty="0"/>
-          </a:p>
-        </p:txBody>
-      </p:sp>
-      <p:sp>
-        <p:nvSpPr>
-          <p:cNvPr id="32" name="Text 27"/>
-          <p:cNvSpPr txBox="1"/>
-          <p:nvPr/>
-        </p:nvSpPr>
-        <p:spPr>
-          <a:xfrm>
-            <a:off x="10698480" y="3977640"/>
-            <a:ext cx="1097280" cy="292608"/>
-          </a:xfrm>
-          <a:prstGeom prst="rect">
-            <a:avLst/>
-          </a:prstGeom>
-          <a:noFill/>
-          <a:ln w="12700">
-            <a:solidFill>
-              <a:srgbClr val="444444"/>
-            </a:solidFill>
-          </a:ln>
+            <a:endParaRPr lang="en-US" sz="1050" dirty="0"/>
+          </a:p>
+        </p:txBody>
+      </p:sp>
+      <p:sp>
+        <p:nvSpPr>
+          <p:cNvPr id="47" name="Text 34"/>
+          <p:cNvSpPr txBox="1"/>
+          <p:nvPr/>
+        </p:nvSpPr>
+        <p:spPr>
+          <a:xfrm>
+            <a:off x="10698480" y="2423160"/>
+            <a:ext cx="1005840" cy="347472"/>
+          </a:xfrm>
+          <a:prstGeom prst="roundRect">
+            <a:avLst>
+              <a:gd name="adj" fmla="val 21053"/>
+            </a:avLst>
+          </a:prstGeom>
+          <a:solidFill>
+            <a:srgbClr val="8A8F98"/>
+          </a:solidFill>
+          <a:ln/>
         </p:spPr>
         <p:txBody>
           <a:bodyPr wrap="square" lIns="0" tIns="0" rIns="0" bIns="0" rtlCol="0" anchor="ctr"/>
@@ -4087,30 +4910,96 @@
               <a:buNone/>
             </a:pPr>
             <a:r>
-              <a:rPr lang="en-US" sz="950" b="1" dirty="0">
-                <a:solidFill>
-                  <a:srgbClr val="444444"/>
-                </a:solidFill>
-                <a:latin typeface="Arial" pitchFamily="34" charset="0"/>
-                <a:ea typeface="Arial" pitchFamily="34" charset="-122"/>
-                <a:cs typeface="Arial" pitchFamily="34" charset="-120"/>
+              <a:rPr lang="en-US" sz="1050" b="1" dirty="0">
+                <a:solidFill>
+                  <a:srgbClr val="FFFFFF"/>
+                </a:solidFill>
+                <a:latin typeface="Calibri" pitchFamily="34" charset="0"/>
+                <a:ea typeface="Calibri" pitchFamily="34" charset="-122"/>
+                <a:cs typeface="Calibri" pitchFamily="34" charset="-120"/>
               </a:rPr>
               <a:t>EVAL_ERROR</a:t>
             </a:r>
+            <a:endParaRPr lang="en-US" sz="1050" dirty="0"/>
+          </a:p>
+        </p:txBody>
+      </p:sp>
+      <p:sp>
+        <p:nvSpPr>
+          <p:cNvPr id="48" name="Text 35"/>
+          <p:cNvSpPr txBox="1"/>
+          <p:nvPr/>
+        </p:nvSpPr>
+        <p:spPr>
+          <a:xfrm>
+            <a:off x="8503920" y="2880360"/>
+            <a:ext cx="3154680" cy="777240"/>
+          </a:xfrm>
+          <a:prstGeom prst="rect">
+            <a:avLst/>
+          </a:prstGeom>
+          <a:noFill/>
+          <a:ln/>
+        </p:spPr>
+        <p:txBody>
+          <a:bodyPr wrap="square" lIns="0" tIns="0" rIns="0" bIns="0" rtlCol="0" anchor="t"/>
+          <a:lstStyle/>
+          <a:p>
+            <a:pPr algn="l" indent="0" marL="0">
+              <a:lnSpc>
+                <a:spcPct val="105000"/>
+              </a:lnSpc>
+              <a:buNone/>
+            </a:pPr>
+            <a:r>
+              <a:rPr lang="en-US" sz="950" dirty="0">
+                <a:solidFill>
+                  <a:srgbClr val="5B6470"/>
+                </a:solidFill>
+                <a:latin typeface="Calibri" pitchFamily="34" charset="0"/>
+                <a:ea typeface="Calibri" pitchFamily="34" charset="-122"/>
+                <a:cs typeface="Calibri" pitchFamily="34" charset="-120"/>
+              </a:rPr>
+              <a:t>EVAL_ERROR means something on our side broke (setup, recorder, checker, API). Those runs are thrown out and rerun. They are never counted as a model failure.</a:t>
+            </a:r>
             <a:endParaRPr lang="en-US" sz="950" dirty="0"/>
           </a:p>
         </p:txBody>
       </p:sp>
-      <p:sp>
-        <p:nvSpPr>
-          <p:cNvPr id="33" name="Text 28"/>
-          <p:cNvSpPr txBox="1"/>
-          <p:nvPr/>
-        </p:nvSpPr>
-        <p:spPr>
-          <a:xfrm>
-            <a:off x="8412480" y="4343400"/>
-            <a:ext cx="3337560" cy="868680"/>
+      <p:pic>
+        <p:nvPicPr>
+          <p:cNvPr id="49" name="Image 11" descr="preencoded.png">    </p:cNvPr>
+          <p:cNvPicPr>
+            <a:picLocks noChangeAspect="1"/>
+          </p:cNvPicPr>
+          <p:nvPr/>
+        </p:nvPicPr>
+        <p:blipFill>
+          <a:blip r:embed="rId12"/>
+          <a:stretch>
+            <a:fillRect/>
+          </a:stretch>
+        </p:blipFill>
+        <p:spPr>
+          <a:xfrm>
+            <a:off x="8503920" y="3794760"/>
+            <a:ext cx="384048" cy="384048"/>
+          </a:xfrm>
+          <a:prstGeom prst="rect">
+            <a:avLst/>
+          </a:prstGeom>
+        </p:spPr>
+      </p:pic>
+      <p:sp>
+        <p:nvSpPr>
+          <p:cNvPr id="50" name="Text 36"/>
+          <p:cNvSpPr txBox="1"/>
+          <p:nvPr/>
+        </p:nvSpPr>
+        <p:spPr>
+          <a:xfrm>
+            <a:off x="9052560" y="3749040"/>
+            <a:ext cx="2834640" cy="274320"/>
           </a:xfrm>
           <a:prstGeom prst="rect">
             <a:avLst/>
@@ -4124,6 +5013,48 @@
           <a:p>
             <a:pPr algn="l" indent="0" marL="0">
               <a:lnSpc>
+                <a:spcPct val="100000"/>
+              </a:lnSpc>
+              <a:buNone/>
+            </a:pPr>
+            <a:r>
+              <a:rPr lang="en-US" sz="1200" b="1" dirty="0">
+                <a:solidFill>
+                  <a:srgbClr val="1F2A44"/>
+                </a:solidFill>
+                <a:latin typeface="Calibri" pitchFamily="34" charset="0"/>
+                <a:ea typeface="Calibri" pitchFamily="34" charset="-122"/>
+                <a:cs typeface="Calibri" pitchFamily="34" charset="-120"/>
+              </a:rPr>
+              <a:t>Pairs</a:t>
+            </a:r>
+            <a:endParaRPr lang="en-US" sz="1200" dirty="0"/>
+          </a:p>
+        </p:txBody>
+      </p:sp>
+      <p:sp>
+        <p:nvSpPr>
+          <p:cNvPr id="51" name="Text 37"/>
+          <p:cNvSpPr txBox="1"/>
+          <p:nvPr/>
+        </p:nvSpPr>
+        <p:spPr>
+          <a:xfrm>
+            <a:off x="9052560" y="4023360"/>
+            <a:ext cx="2788920" cy="1005840"/>
+          </a:xfrm>
+          <a:prstGeom prst="rect">
+            <a:avLst/>
+          </a:prstGeom>
+          <a:noFill/>
+          <a:ln/>
+        </p:spPr>
+        <p:txBody>
+          <a:bodyPr wrap="square" lIns="0" tIns="0" rIns="0" bIns="0" rtlCol="0" anchor="t"/>
+          <a:lstStyle/>
+          <a:p>
+            <a:pPr algn="l" indent="0" marL="0">
+              <a:lnSpc>
                 <a:spcPct val="105000"/>
               </a:lnSpc>
               <a:buNone/>
@@ -4131,28 +5062,52 @@
             <a:r>
               <a:rPr lang="en-US" sz="950" dirty="0">
                 <a:solidFill>
-                  <a:srgbClr val="444444"/>
-                </a:solidFill>
-                <a:latin typeface="Arial" pitchFamily="34" charset="0"/>
-                <a:ea typeface="Arial" pitchFamily="34" charset="-122"/>
-                <a:cs typeface="Arial" pitchFamily="34" charset="-120"/>
-              </a:rPr>
-              <a:t>EVAL_ERROR means something on our side broke (setup, recorder, checker, API). Those runs are thrown out and rerun. They are never counted as a model failure.</a:t>
+                  <a:srgbClr val="5B6470"/>
+                </a:solidFill>
+                <a:latin typeface="Calibri" pitchFamily="34" charset="0"/>
+                <a:ea typeface="Calibri" pitchFamily="34" charset="-122"/>
+                <a:cs typeface="Calibri" pitchFamily="34" charset="-120"/>
+              </a:rPr>
+              <a:t>Each task in English is compared with the same task in Arabic. When one language passes and the other fails, the pair is rerun 3 times and checked by hand before it counts.</a:t>
             </a:r>
             <a:endParaRPr lang="en-US" sz="950" dirty="0"/>
           </a:p>
         </p:txBody>
       </p:sp>
-      <p:sp>
-        <p:nvSpPr>
-          <p:cNvPr id="34" name="Text 29"/>
-          <p:cNvSpPr txBox="1"/>
-          <p:nvPr/>
-        </p:nvSpPr>
-        <p:spPr>
-          <a:xfrm>
-            <a:off x="8412480" y="5303520"/>
-            <a:ext cx="3337560" cy="228600"/>
+      <p:pic>
+        <p:nvPicPr>
+          <p:cNvPr id="52" name="Image 12" descr="preencoded.png">    </p:cNvPr>
+          <p:cNvPicPr>
+            <a:picLocks noChangeAspect="1"/>
+          </p:cNvPicPr>
+          <p:nvPr/>
+        </p:nvPicPr>
+        <p:blipFill>
+          <a:blip r:embed="rId13"/>
+          <a:stretch>
+            <a:fillRect/>
+          </a:stretch>
+        </p:blipFill>
+        <p:spPr>
+          <a:xfrm>
+            <a:off x="8503920" y="5074920"/>
+            <a:ext cx="384048" cy="384048"/>
+          </a:xfrm>
+          <a:prstGeom prst="rect">
+            <a:avLst/>
+          </a:prstGeom>
+        </p:spPr>
+      </p:pic>
+      <p:sp>
+        <p:nvSpPr>
+          <p:cNvPr id="53" name="Text 38"/>
+          <p:cNvSpPr txBox="1"/>
+          <p:nvPr/>
+        </p:nvSpPr>
+        <p:spPr>
+          <a:xfrm>
+            <a:off x="9052560" y="5029200"/>
+            <a:ext cx="2834640" cy="274320"/>
           </a:xfrm>
           <a:prstGeom prst="rect">
             <a:avLst/>
@@ -4171,30 +5126,30 @@
               <a:buNone/>
             </a:pPr>
             <a:r>
-              <a:rPr lang="en-US" sz="1100" b="1" dirty="0">
-                <a:solidFill>
-                  <a:srgbClr val="111111"/>
-                </a:solidFill>
-                <a:latin typeface="Arial" pitchFamily="34" charset="0"/>
-                <a:ea typeface="Arial" pitchFamily="34" charset="-122"/>
-                <a:cs typeface="Arial" pitchFamily="34" charset="-120"/>
-              </a:rPr>
-              <a:t>Pairs</a:t>
-            </a:r>
-            <a:endParaRPr lang="en-US" sz="1100" dirty="0"/>
-          </a:p>
-        </p:txBody>
-      </p:sp>
-      <p:sp>
-        <p:nvSpPr>
-          <p:cNvPr id="35" name="Text 30"/>
-          <p:cNvSpPr txBox="1"/>
-          <p:nvPr/>
-        </p:nvSpPr>
-        <p:spPr>
-          <a:xfrm>
-            <a:off x="8412480" y="5532120"/>
-            <a:ext cx="3337560" cy="960120"/>
+              <a:rPr lang="en-US" sz="1200" b="1" dirty="0">
+                <a:solidFill>
+                  <a:srgbClr val="1F2A44"/>
+                </a:solidFill>
+                <a:latin typeface="Calibri" pitchFamily="34" charset="0"/>
+                <a:ea typeface="Calibri" pitchFamily="34" charset="-122"/>
+                <a:cs typeface="Calibri" pitchFamily="34" charset="-120"/>
+              </a:rPr>
+              <a:t>Audit</a:t>
+            </a:r>
+            <a:endParaRPr lang="en-US" sz="1200" dirty="0"/>
+          </a:p>
+        </p:txBody>
+      </p:sp>
+      <p:sp>
+        <p:nvSpPr>
+          <p:cNvPr id="54" name="Text 39"/>
+          <p:cNvSpPr txBox="1"/>
+          <p:nvPr/>
+        </p:nvSpPr>
+        <p:spPr>
+          <a:xfrm>
+            <a:off x="9052560" y="5303520"/>
+            <a:ext cx="2788920" cy="914400"/>
           </a:xfrm>
           <a:prstGeom prst="rect">
             <a:avLst/>
@@ -4215,13 +5170,13 @@
             <a:r>
               <a:rPr lang="en-US" sz="950" dirty="0">
                 <a:solidFill>
-                  <a:srgbClr val="444444"/>
-                </a:solidFill>
-                <a:latin typeface="Arial" pitchFamily="34" charset="0"/>
-                <a:ea typeface="Arial" pitchFamily="34" charset="-122"/>
-                <a:cs typeface="Arial" pitchFamily="34" charset="-120"/>
-              </a:rPr>
-              <a:t>We compare each task in English against the same task in Arabic. When one language passes and the other fails, that pair is rerun 3 times and checked by hand before it counts.</a:t>
+                  <a:srgbClr val="5B6470"/>
+                </a:solidFill>
+                <a:latin typeface="Calibri" pitchFamily="34" charset="0"/>
+                <a:ea typeface="Calibri" pitchFamily="34" charset="-122"/>
+                <a:cs typeface="Calibri" pitchFamily="34" charset="-120"/>
+              </a:rPr>
+              <a:t>Every pass is checked against its screenshots. Every fail gets a reason.</a:t>
             </a:r>
             <a:endParaRPr lang="en-US" sz="950" dirty="0"/>
           </a:p>

--- a/figures/figures.pptx
+++ b/figures/figures.pptx
@@ -1279,7 +1279,7 @@
                 <a:ea typeface="Calibri" pitchFamily="34" charset="-122"/>
                 <a:cs typeface="Calibri" pitchFamily="34" charset="-120"/>
               </a:rPr>
-              <a:t>The same task is also translated to Egyptian, Syrian, Qatari, Sudanese and Algerian Arabic.</a:t>
+              <a:t>The same task is also translated to Egyptian, Syrian, Qatari and Sudanese Arabic.</a:t>
             </a:r>
             <a:endParaRPr lang="en-US" sz="900" dirty="0"/>
           </a:p>
@@ -2410,7 +2410,7 @@
                 <a:ea typeface="Calibri" pitchFamily="34" charset="-122"/>
                 <a:cs typeface="Calibri" pitchFamily="34" charset="-120"/>
               </a:rPr>
-              <a:t>Translated by humans to MSA and 5 dialects: Egyptian, Syrian, Qatari, Sudanese, Algerian</a:t>
+              <a:t>Translated by humans to MSA and 4 dialects: Egyptian, Syrian, Qatari, Sudanese</a:t>
             </a:r>
             <a:endParaRPr lang="en-US" sz="850" dirty="0"/>
           </a:p>

--- a/figures/figures.pptx
+++ b/figures/figures.pptx
@@ -1279,7 +1279,7 @@
                 <a:ea typeface="Calibri" pitchFamily="34" charset="-122"/>
                 <a:cs typeface="Calibri" pitchFamily="34" charset="-120"/>
               </a:rPr>
-              <a:t>The same task is also translated to Egyptian, Syrian, Qatari and Sudanese Arabic.</a:t>
+              <a:t>The same task is also translated to Egyptian, Syrian, Qatari, Sudanese and Algerian Arabic.</a:t>
             </a:r>
             <a:endParaRPr lang="en-US" sz="900" dirty="0"/>
           </a:p>
@@ -2410,7 +2410,7 @@
                 <a:ea typeface="Calibri" pitchFamily="34" charset="-122"/>
                 <a:cs typeface="Calibri" pitchFamily="34" charset="-120"/>
               </a:rPr>
-              <a:t>Translated by humans to MSA and 4 dialects: Egyptian, Syrian, Qatari, Sudanese</a:t>
+              <a:t>Translated by humans to MSA and 5 dialects: Egyptian, Syrian, Qatari, Sudanese, Algerian</a:t>
             </a:r>
             <a:endParaRPr lang="en-US" sz="850" dirty="0"/>
           </a:p>
